--- a/docs/pptx/whole/ritu-linsubhr-ratio-anemia2_10pct.pptx
+++ b/docs/pptx/whole/ritu-linsubhr-ratio-anemia2_10pct.pptx
@@ -3389,612 +3389,612 @@
           </p:nvSpPr>
           <p:spPr>
             <a:xfrm>
-              <a:off x="1172049" y="2478906"/>
-              <a:ext cx="7090630" cy="2918789"/>
+              <a:off x="1172049" y="2493804"/>
+              <a:ext cx="7090630" cy="2902915"/>
             </a:xfrm>
             <a:custGeom>
               <a:avLst/>
               <a:pathLst>
-                <a:path w="7090630" h="2918789">
+                <a:path w="7090630" h="2902915">
                   <a:moveTo>
                     <a:pt x="0" y="0"/>
                   </a:moveTo>
                   <a:lnTo>
-                    <a:pt x="71622" y="90669"/>
-                  </a:lnTo>
-                  <a:lnTo>
-                    <a:pt x="143245" y="178669"/>
-                  </a:lnTo>
-                  <a:lnTo>
-                    <a:pt x="214867" y="264076"/>
-                  </a:lnTo>
-                  <a:lnTo>
-                    <a:pt x="286490" y="346968"/>
-                  </a:lnTo>
-                  <a:lnTo>
-                    <a:pt x="358112" y="427418"/>
-                  </a:lnTo>
-                  <a:lnTo>
-                    <a:pt x="429735" y="505498"/>
-                  </a:lnTo>
-                  <a:lnTo>
-                    <a:pt x="501357" y="581279"/>
-                  </a:lnTo>
-                  <a:lnTo>
-                    <a:pt x="572980" y="654828"/>
-                  </a:lnTo>
-                  <a:lnTo>
-                    <a:pt x="644602" y="726211"/>
-                  </a:lnTo>
-                  <a:lnTo>
-                    <a:pt x="716225" y="795491"/>
-                  </a:lnTo>
-                  <a:lnTo>
-                    <a:pt x="787847" y="862730"/>
-                  </a:lnTo>
-                  <a:lnTo>
-                    <a:pt x="859470" y="927989"/>
-                  </a:lnTo>
-                  <a:lnTo>
-                    <a:pt x="931092" y="991326"/>
-                  </a:lnTo>
-                  <a:lnTo>
-                    <a:pt x="1002715" y="1052797"/>
-                  </a:lnTo>
-                  <a:lnTo>
-                    <a:pt x="1074337" y="1112457"/>
-                  </a:lnTo>
-                  <a:lnTo>
-                    <a:pt x="1145960" y="1170361"/>
-                  </a:lnTo>
-                  <a:lnTo>
-                    <a:pt x="1217582" y="1226559"/>
-                  </a:lnTo>
-                  <a:lnTo>
-                    <a:pt x="1289205" y="1281101"/>
-                  </a:lnTo>
-                  <a:lnTo>
-                    <a:pt x="1360827" y="1334038"/>
-                  </a:lnTo>
-                  <a:lnTo>
-                    <a:pt x="1432450" y="1385415"/>
-                  </a:lnTo>
-                  <a:lnTo>
-                    <a:pt x="1504073" y="1435278"/>
-                  </a:lnTo>
-                  <a:lnTo>
-                    <a:pt x="1575695" y="1483673"/>
-                  </a:lnTo>
-                  <a:lnTo>
-                    <a:pt x="1647318" y="1530643"/>
-                  </a:lnTo>
-                  <a:lnTo>
-                    <a:pt x="1718940" y="1576229"/>
-                  </a:lnTo>
-                  <a:lnTo>
-                    <a:pt x="1790563" y="1620472"/>
-                  </a:lnTo>
-                  <a:lnTo>
-                    <a:pt x="1862185" y="1663413"/>
-                  </a:lnTo>
-                  <a:lnTo>
-                    <a:pt x="1933808" y="1705088"/>
-                  </a:lnTo>
-                  <a:lnTo>
-                    <a:pt x="2005430" y="1745536"/>
-                  </a:lnTo>
-                  <a:lnTo>
-                    <a:pt x="2077053" y="1784793"/>
-                  </a:lnTo>
-                  <a:lnTo>
-                    <a:pt x="2148675" y="1822893"/>
-                  </a:lnTo>
-                  <a:lnTo>
-                    <a:pt x="2220298" y="1859871"/>
-                  </a:lnTo>
-                  <a:lnTo>
-                    <a:pt x="2291920" y="1895760"/>
-                  </a:lnTo>
-                  <a:lnTo>
-                    <a:pt x="2363543" y="1930592"/>
-                  </a:lnTo>
-                  <a:lnTo>
-                    <a:pt x="2435165" y="1964398"/>
-                  </a:lnTo>
-                  <a:lnTo>
-                    <a:pt x="2506788" y="1997209"/>
-                  </a:lnTo>
-                  <a:lnTo>
-                    <a:pt x="2578410" y="2029052"/>
-                  </a:lnTo>
-                  <a:lnTo>
-                    <a:pt x="2650033" y="2059958"/>
-                  </a:lnTo>
-                  <a:lnTo>
-                    <a:pt x="2721655" y="2089954"/>
-                  </a:lnTo>
-                  <a:lnTo>
-                    <a:pt x="2793278" y="2119066"/>
-                  </a:lnTo>
-                  <a:lnTo>
-                    <a:pt x="2864901" y="2147321"/>
-                  </a:lnTo>
-                  <a:lnTo>
-                    <a:pt x="2936523" y="2174743"/>
-                  </a:lnTo>
-                  <a:lnTo>
-                    <a:pt x="3008146" y="2201358"/>
-                  </a:lnTo>
-                  <a:lnTo>
-                    <a:pt x="3079768" y="2227189"/>
-                  </a:lnTo>
-                  <a:lnTo>
-                    <a:pt x="3151391" y="2249720"/>
-                  </a:lnTo>
-                  <a:lnTo>
-                    <a:pt x="3223013" y="2255848"/>
-                  </a:lnTo>
-                  <a:lnTo>
-                    <a:pt x="3294636" y="2261931"/>
-                  </a:lnTo>
-                  <a:lnTo>
-                    <a:pt x="3366258" y="2267969"/>
-                  </a:lnTo>
-                  <a:lnTo>
-                    <a:pt x="3437881" y="2273962"/>
-                  </a:lnTo>
-                  <a:lnTo>
-                    <a:pt x="3509503" y="2279911"/>
-                  </a:lnTo>
-                  <a:lnTo>
-                    <a:pt x="3581126" y="2285816"/>
-                  </a:lnTo>
-                  <a:lnTo>
-                    <a:pt x="3652748" y="2291677"/>
-                  </a:lnTo>
-                  <a:lnTo>
-                    <a:pt x="3724371" y="2297495"/>
-                  </a:lnTo>
-                  <a:lnTo>
-                    <a:pt x="3795993" y="2303270"/>
-                  </a:lnTo>
-                  <a:lnTo>
-                    <a:pt x="3867616" y="2309002"/>
-                  </a:lnTo>
-                  <a:lnTo>
-                    <a:pt x="3939238" y="2314691"/>
-                  </a:lnTo>
-                  <a:lnTo>
-                    <a:pt x="4010861" y="2320339"/>
-                  </a:lnTo>
-                  <a:lnTo>
-                    <a:pt x="4082483" y="2325945"/>
-                  </a:lnTo>
-                  <a:lnTo>
-                    <a:pt x="4154106" y="2331509"/>
-                  </a:lnTo>
-                  <a:lnTo>
-                    <a:pt x="4225729" y="2337033"/>
-                  </a:lnTo>
-                  <a:lnTo>
-                    <a:pt x="4297351" y="2342515"/>
-                  </a:lnTo>
-                  <a:lnTo>
-                    <a:pt x="4368974" y="2347957"/>
-                  </a:lnTo>
-                  <a:lnTo>
-                    <a:pt x="4440596" y="2353359"/>
-                  </a:lnTo>
-                  <a:lnTo>
-                    <a:pt x="4512219" y="2358720"/>
-                  </a:lnTo>
-                  <a:lnTo>
-                    <a:pt x="4583841" y="2364042"/>
-                  </a:lnTo>
-                  <a:lnTo>
-                    <a:pt x="4655464" y="2369325"/>
-                  </a:lnTo>
-                  <a:lnTo>
-                    <a:pt x="4727086" y="2374568"/>
-                  </a:lnTo>
-                  <a:lnTo>
-                    <a:pt x="4798709" y="2379773"/>
-                  </a:lnTo>
-                  <a:lnTo>
-                    <a:pt x="4870331" y="2384940"/>
-                  </a:lnTo>
-                  <a:lnTo>
-                    <a:pt x="4941954" y="2390068"/>
-                  </a:lnTo>
-                  <a:lnTo>
-                    <a:pt x="5013576" y="2395158"/>
-                  </a:lnTo>
-                  <a:lnTo>
-                    <a:pt x="5085199" y="2400210"/>
-                  </a:lnTo>
-                  <a:lnTo>
-                    <a:pt x="5156821" y="2405226"/>
-                  </a:lnTo>
-                  <a:lnTo>
-                    <a:pt x="5228444" y="2410204"/>
-                  </a:lnTo>
-                  <a:lnTo>
-                    <a:pt x="5300066" y="2415145"/>
-                  </a:lnTo>
-                  <a:lnTo>
-                    <a:pt x="5371689" y="2420050"/>
-                  </a:lnTo>
-                  <a:lnTo>
-                    <a:pt x="5443311" y="2424918"/>
-                  </a:lnTo>
-                  <a:lnTo>
-                    <a:pt x="5514934" y="2429751"/>
-                  </a:lnTo>
-                  <a:lnTo>
-                    <a:pt x="5586557" y="2434547"/>
-                  </a:lnTo>
-                  <a:lnTo>
-                    <a:pt x="5658179" y="2439309"/>
-                  </a:lnTo>
-                  <a:lnTo>
-                    <a:pt x="5729802" y="2444035"/>
-                  </a:lnTo>
-                  <a:lnTo>
-                    <a:pt x="5801424" y="2448726"/>
-                  </a:lnTo>
-                  <a:lnTo>
-                    <a:pt x="5873047" y="2453382"/>
-                  </a:lnTo>
-                  <a:lnTo>
-                    <a:pt x="5944669" y="2458004"/>
-                  </a:lnTo>
-                  <a:lnTo>
-                    <a:pt x="6016292" y="2462592"/>
-                  </a:lnTo>
-                  <a:lnTo>
-                    <a:pt x="6087914" y="2467146"/>
-                  </a:lnTo>
-                  <a:lnTo>
-                    <a:pt x="6159537" y="2471666"/>
-                  </a:lnTo>
-                  <a:lnTo>
-                    <a:pt x="6231159" y="2476152"/>
-                  </a:lnTo>
-                  <a:lnTo>
-                    <a:pt x="6302782" y="2480606"/>
-                  </a:lnTo>
-                  <a:lnTo>
-                    <a:pt x="6374404" y="2485027"/>
-                  </a:lnTo>
-                  <a:lnTo>
-                    <a:pt x="6446027" y="2489415"/>
-                  </a:lnTo>
-                  <a:lnTo>
-                    <a:pt x="6517649" y="2493770"/>
-                  </a:lnTo>
-                  <a:lnTo>
-                    <a:pt x="6589272" y="2498093"/>
-                  </a:lnTo>
-                  <a:lnTo>
-                    <a:pt x="6660894" y="2502385"/>
-                  </a:lnTo>
-                  <a:lnTo>
-                    <a:pt x="6732517" y="2506644"/>
-                  </a:lnTo>
-                  <a:lnTo>
-                    <a:pt x="6804139" y="2510872"/>
-                  </a:lnTo>
-                  <a:lnTo>
-                    <a:pt x="6875762" y="2515069"/>
-                  </a:lnTo>
-                  <a:lnTo>
-                    <a:pt x="6947385" y="2519235"/>
-                  </a:lnTo>
-                  <a:lnTo>
-                    <a:pt x="7019007" y="2523370"/>
-                  </a:lnTo>
-                  <a:lnTo>
-                    <a:pt x="7090630" y="2527474"/>
-                  </a:lnTo>
-                  <a:lnTo>
-                    <a:pt x="7090630" y="2918789"/>
-                  </a:lnTo>
-                  <a:lnTo>
-                    <a:pt x="7019007" y="2913947"/>
-                  </a:lnTo>
-                  <a:lnTo>
-                    <a:pt x="6947385" y="2908958"/>
-                  </a:lnTo>
-                  <a:lnTo>
-                    <a:pt x="6875762" y="2903817"/>
-                  </a:lnTo>
-                  <a:lnTo>
-                    <a:pt x="6804139" y="2898521"/>
-                  </a:lnTo>
-                  <a:lnTo>
-                    <a:pt x="6732517" y="2893063"/>
-                  </a:lnTo>
-                  <a:lnTo>
-                    <a:pt x="6660894" y="2887441"/>
-                  </a:lnTo>
-                  <a:lnTo>
-                    <a:pt x="6589272" y="2881647"/>
-                  </a:lnTo>
-                  <a:lnTo>
-                    <a:pt x="6517649" y="2875678"/>
-                  </a:lnTo>
-                  <a:lnTo>
-                    <a:pt x="6446027" y="2869527"/>
-                  </a:lnTo>
-                  <a:lnTo>
-                    <a:pt x="6374404" y="2863190"/>
-                  </a:lnTo>
-                  <a:lnTo>
-                    <a:pt x="6302782" y="2856661"/>
-                  </a:lnTo>
-                  <a:lnTo>
-                    <a:pt x="6231159" y="2849933"/>
-                  </a:lnTo>
-                  <a:lnTo>
-                    <a:pt x="6159537" y="2843001"/>
-                  </a:lnTo>
-                  <a:lnTo>
-                    <a:pt x="6087914" y="2835859"/>
-                  </a:lnTo>
-                  <a:lnTo>
-                    <a:pt x="6016292" y="2828500"/>
-                  </a:lnTo>
-                  <a:lnTo>
-                    <a:pt x="5944669" y="2820918"/>
-                  </a:lnTo>
-                  <a:lnTo>
-                    <a:pt x="5873047" y="2813106"/>
-                  </a:lnTo>
-                  <a:lnTo>
-                    <a:pt x="5801424" y="2805056"/>
-                  </a:lnTo>
-                  <a:lnTo>
-                    <a:pt x="5729802" y="2796762"/>
-                  </a:lnTo>
-                  <a:lnTo>
-                    <a:pt x="5658179" y="2788217"/>
-                  </a:lnTo>
-                  <a:lnTo>
-                    <a:pt x="5586557" y="2779412"/>
-                  </a:lnTo>
-                  <a:lnTo>
-                    <a:pt x="5514934" y="2770340"/>
-                  </a:lnTo>
-                  <a:lnTo>
-                    <a:pt x="5443311" y="2760993"/>
-                  </a:lnTo>
-                  <a:lnTo>
-                    <a:pt x="5371689" y="2751362"/>
-                  </a:lnTo>
-                  <a:lnTo>
-                    <a:pt x="5300066" y="2741439"/>
-                  </a:lnTo>
-                  <a:lnTo>
-                    <a:pt x="5228444" y="2731214"/>
-                  </a:lnTo>
-                  <a:lnTo>
-                    <a:pt x="5156821" y="2720680"/>
-                  </a:lnTo>
-                  <a:lnTo>
-                    <a:pt x="5085199" y="2709825"/>
-                  </a:lnTo>
-                  <a:lnTo>
-                    <a:pt x="5013576" y="2698642"/>
-                  </a:lnTo>
-                  <a:lnTo>
-                    <a:pt x="4941954" y="2687118"/>
-                  </a:lnTo>
-                  <a:lnTo>
-                    <a:pt x="4870331" y="2675246"/>
-                  </a:lnTo>
-                  <a:lnTo>
-                    <a:pt x="4798709" y="2663012"/>
-                  </a:lnTo>
-                  <a:lnTo>
-                    <a:pt x="4727086" y="2650408"/>
-                  </a:lnTo>
-                  <a:lnTo>
-                    <a:pt x="4655464" y="2637421"/>
-                  </a:lnTo>
-                  <a:lnTo>
-                    <a:pt x="4583841" y="2624040"/>
-                  </a:lnTo>
-                  <a:lnTo>
-                    <a:pt x="4512219" y="2610253"/>
-                  </a:lnTo>
-                  <a:lnTo>
-                    <a:pt x="4440596" y="2596047"/>
-                  </a:lnTo>
-                  <a:lnTo>
-                    <a:pt x="4368974" y="2581410"/>
-                  </a:lnTo>
-                  <a:lnTo>
-                    <a:pt x="4297351" y="2566329"/>
-                  </a:lnTo>
-                  <a:lnTo>
-                    <a:pt x="4225729" y="2550791"/>
-                  </a:lnTo>
-                  <a:lnTo>
-                    <a:pt x="4154106" y="2534781"/>
-                  </a:lnTo>
-                  <a:lnTo>
-                    <a:pt x="4082483" y="2518285"/>
-                  </a:lnTo>
-                  <a:lnTo>
-                    <a:pt x="4010861" y="2501288"/>
-                  </a:lnTo>
-                  <a:lnTo>
-                    <a:pt x="3939238" y="2483776"/>
-                  </a:lnTo>
-                  <a:lnTo>
-                    <a:pt x="3867616" y="2465732"/>
-                  </a:lnTo>
-                  <a:lnTo>
-                    <a:pt x="3795993" y="2447140"/>
-                  </a:lnTo>
-                  <a:lnTo>
-                    <a:pt x="3724371" y="2427984"/>
-                  </a:lnTo>
-                  <a:lnTo>
-                    <a:pt x="3652748" y="2408247"/>
-                  </a:lnTo>
-                  <a:lnTo>
-                    <a:pt x="3581126" y="2387911"/>
-                  </a:lnTo>
-                  <a:lnTo>
-                    <a:pt x="3509503" y="2366958"/>
-                  </a:lnTo>
-                  <a:lnTo>
-                    <a:pt x="3437881" y="2345369"/>
-                  </a:lnTo>
-                  <a:lnTo>
-                    <a:pt x="3366258" y="2323125"/>
-                  </a:lnTo>
-                  <a:lnTo>
-                    <a:pt x="3294636" y="2300205"/>
-                  </a:lnTo>
-                  <a:lnTo>
-                    <a:pt x="3223013" y="2276590"/>
-                  </a:lnTo>
-                  <a:lnTo>
-                    <a:pt x="3151391" y="2252259"/>
-                  </a:lnTo>
-                  <a:lnTo>
-                    <a:pt x="3079768" y="2243546"/>
-                  </a:lnTo>
-                  <a:lnTo>
-                    <a:pt x="3008146" y="2237327"/>
-                  </a:lnTo>
-                  <a:lnTo>
-                    <a:pt x="2936523" y="2231060"/>
-                  </a:lnTo>
-                  <a:lnTo>
-                    <a:pt x="2864901" y="2224748"/>
-                  </a:lnTo>
-                  <a:lnTo>
-                    <a:pt x="2793278" y="2218388"/>
-                  </a:lnTo>
-                  <a:lnTo>
-                    <a:pt x="2721655" y="2211980"/>
-                  </a:lnTo>
-                  <a:lnTo>
-                    <a:pt x="2650033" y="2205525"/>
-                  </a:lnTo>
-                  <a:lnTo>
-                    <a:pt x="2578410" y="2199022"/>
-                  </a:lnTo>
-                  <a:lnTo>
-                    <a:pt x="2506788" y="2192471"/>
-                  </a:lnTo>
-                  <a:lnTo>
-                    <a:pt x="2435165" y="2185871"/>
-                  </a:lnTo>
-                  <a:lnTo>
-                    <a:pt x="2363543" y="2179221"/>
-                  </a:lnTo>
-                  <a:lnTo>
-                    <a:pt x="2291920" y="2172522"/>
-                  </a:lnTo>
-                  <a:lnTo>
-                    <a:pt x="2220298" y="2165773"/>
-                  </a:lnTo>
-                  <a:lnTo>
-                    <a:pt x="2148675" y="2158974"/>
-                  </a:lnTo>
-                  <a:lnTo>
-                    <a:pt x="2077053" y="2152124"/>
-                  </a:lnTo>
-                  <a:lnTo>
-                    <a:pt x="2005430" y="2145223"/>
-                  </a:lnTo>
-                  <a:lnTo>
-                    <a:pt x="1933808" y="2138270"/>
-                  </a:lnTo>
-                  <a:lnTo>
-                    <a:pt x="1862185" y="2131266"/>
-                  </a:lnTo>
-                  <a:lnTo>
-                    <a:pt x="1790563" y="2124210"/>
-                  </a:lnTo>
-                  <a:lnTo>
-                    <a:pt x="1718940" y="2117101"/>
-                  </a:lnTo>
-                  <a:lnTo>
-                    <a:pt x="1647318" y="2109939"/>
-                  </a:lnTo>
-                  <a:lnTo>
-                    <a:pt x="1575695" y="2102724"/>
-                  </a:lnTo>
-                  <a:lnTo>
-                    <a:pt x="1504073" y="2095455"/>
-                  </a:lnTo>
-                  <a:lnTo>
-                    <a:pt x="1432450" y="2088132"/>
-                  </a:lnTo>
-                  <a:lnTo>
-                    <a:pt x="1360827" y="2080754"/>
-                  </a:lnTo>
-                  <a:lnTo>
-                    <a:pt x="1289205" y="2073321"/>
-                  </a:lnTo>
-                  <a:lnTo>
-                    <a:pt x="1217582" y="2065833"/>
-                  </a:lnTo>
-                  <a:lnTo>
-                    <a:pt x="1145960" y="2058289"/>
-                  </a:lnTo>
-                  <a:lnTo>
-                    <a:pt x="1074337" y="2050689"/>
-                  </a:lnTo>
-                  <a:lnTo>
-                    <a:pt x="1002715" y="2043032"/>
-                  </a:lnTo>
-                  <a:lnTo>
-                    <a:pt x="931092" y="2035319"/>
-                  </a:lnTo>
-                  <a:lnTo>
-                    <a:pt x="859470" y="2027547"/>
-                  </a:lnTo>
-                  <a:lnTo>
-                    <a:pt x="787847" y="2019718"/>
-                  </a:lnTo>
-                  <a:lnTo>
-                    <a:pt x="716225" y="2011831"/>
-                  </a:lnTo>
-                  <a:lnTo>
-                    <a:pt x="644602" y="2003885"/>
-                  </a:lnTo>
-                  <a:lnTo>
-                    <a:pt x="572980" y="1995879"/>
-                  </a:lnTo>
-                  <a:lnTo>
-                    <a:pt x="501357" y="1987814"/>
-                  </a:lnTo>
-                  <a:lnTo>
-                    <a:pt x="429735" y="1979689"/>
-                  </a:lnTo>
-                  <a:lnTo>
-                    <a:pt x="358112" y="1971503"/>
-                  </a:lnTo>
-                  <a:lnTo>
-                    <a:pt x="286490" y="1963257"/>
-                  </a:lnTo>
-                  <a:lnTo>
-                    <a:pt x="214867" y="1954948"/>
-                  </a:lnTo>
-                  <a:lnTo>
-                    <a:pt x="143245" y="1946578"/>
-                  </a:lnTo>
-                  <a:lnTo>
-                    <a:pt x="71622" y="1938146"/>
-                  </a:lnTo>
-                  <a:lnTo>
-                    <a:pt x="0" y="1929651"/>
+                    <a:pt x="71622" y="89902"/>
+                  </a:lnTo>
+                  <a:lnTo>
+                    <a:pt x="143245" y="177166"/>
+                  </a:lnTo>
+                  <a:lnTo>
+                    <a:pt x="214867" y="261868"/>
+                  </a:lnTo>
+                  <a:lnTo>
+                    <a:pt x="286490" y="344086"/>
+                  </a:lnTo>
+                  <a:lnTo>
+                    <a:pt x="358112" y="423890"/>
+                  </a:lnTo>
+                  <a:lnTo>
+                    <a:pt x="429735" y="501352"/>
+                  </a:lnTo>
+                  <a:lnTo>
+                    <a:pt x="501357" y="576541"/>
+                  </a:lnTo>
+                  <a:lnTo>
+                    <a:pt x="572980" y="649524"/>
+                  </a:lnTo>
+                  <a:lnTo>
+                    <a:pt x="644602" y="720365"/>
+                  </a:lnTo>
+                  <a:lnTo>
+                    <a:pt x="716225" y="789127"/>
+                  </a:lnTo>
+                  <a:lnTo>
+                    <a:pt x="787847" y="855870"/>
+                  </a:lnTo>
+                  <a:lnTo>
+                    <a:pt x="859470" y="920656"/>
+                  </a:lnTo>
+                  <a:lnTo>
+                    <a:pt x="931092" y="983540"/>
+                  </a:lnTo>
+                  <a:lnTo>
+                    <a:pt x="1002715" y="1044578"/>
+                  </a:lnTo>
+                  <a:lnTo>
+                    <a:pt x="1074337" y="1103825"/>
+                  </a:lnTo>
+                  <a:lnTo>
+                    <a:pt x="1145960" y="1161334"/>
+                  </a:lnTo>
+                  <a:lnTo>
+                    <a:pt x="1217582" y="1217154"/>
+                  </a:lnTo>
+                  <a:lnTo>
+                    <a:pt x="1289205" y="1271337"/>
+                  </a:lnTo>
+                  <a:lnTo>
+                    <a:pt x="1360827" y="1323930"/>
+                  </a:lnTo>
+                  <a:lnTo>
+                    <a:pt x="1432450" y="1374979"/>
+                  </a:lnTo>
+                  <a:lnTo>
+                    <a:pt x="1504073" y="1424530"/>
+                  </a:lnTo>
+                  <a:lnTo>
+                    <a:pt x="1575695" y="1472627"/>
+                  </a:lnTo>
+                  <a:lnTo>
+                    <a:pt x="1647318" y="1519312"/>
+                  </a:lnTo>
+                  <a:lnTo>
+                    <a:pt x="1718940" y="1564627"/>
+                  </a:lnTo>
+                  <a:lnTo>
+                    <a:pt x="1790563" y="1608613"/>
+                  </a:lnTo>
+                  <a:lnTo>
+                    <a:pt x="1862185" y="1651307"/>
+                  </a:lnTo>
+                  <a:lnTo>
+                    <a:pt x="1933808" y="1692749"/>
+                  </a:lnTo>
+                  <a:lnTo>
+                    <a:pt x="2005430" y="1732974"/>
+                  </a:lnTo>
+                  <a:lnTo>
+                    <a:pt x="2077053" y="1772019"/>
+                  </a:lnTo>
+                  <a:lnTo>
+                    <a:pt x="2148675" y="1809919"/>
+                  </a:lnTo>
+                  <a:lnTo>
+                    <a:pt x="2220298" y="1846706"/>
+                  </a:lnTo>
+                  <a:lnTo>
+                    <a:pt x="2291920" y="1882413"/>
+                  </a:lnTo>
+                  <a:lnTo>
+                    <a:pt x="2363543" y="1917072"/>
+                  </a:lnTo>
+                  <a:lnTo>
+                    <a:pt x="2435165" y="1950715"/>
+                  </a:lnTo>
+                  <a:lnTo>
+                    <a:pt x="2506788" y="1983370"/>
+                  </a:lnTo>
+                  <a:lnTo>
+                    <a:pt x="2578410" y="2015066"/>
+                  </a:lnTo>
+                  <a:lnTo>
+                    <a:pt x="2650033" y="2045833"/>
+                  </a:lnTo>
+                  <a:lnTo>
+                    <a:pt x="2721655" y="2075697"/>
+                  </a:lnTo>
+                  <a:lnTo>
+                    <a:pt x="2793278" y="2104684"/>
+                  </a:lnTo>
+                  <a:lnTo>
+                    <a:pt x="2864901" y="2132820"/>
+                  </a:lnTo>
+                  <a:lnTo>
+                    <a:pt x="2936523" y="2160131"/>
+                  </a:lnTo>
+                  <a:lnTo>
+                    <a:pt x="3008146" y="2186640"/>
+                  </a:lnTo>
+                  <a:lnTo>
+                    <a:pt x="3079768" y="2212372"/>
+                  </a:lnTo>
+                  <a:lnTo>
+                    <a:pt x="3151391" y="2234813"/>
+                  </a:lnTo>
+                  <a:lnTo>
+                    <a:pt x="3223013" y="2240872"/>
+                  </a:lnTo>
+                  <a:lnTo>
+                    <a:pt x="3294636" y="2246887"/>
+                  </a:lnTo>
+                  <a:lnTo>
+                    <a:pt x="3366258" y="2252859"/>
+                  </a:lnTo>
+                  <a:lnTo>
+                    <a:pt x="3437881" y="2258786"/>
+                  </a:lnTo>
+                  <a:lnTo>
+                    <a:pt x="3509503" y="2264671"/>
+                  </a:lnTo>
+                  <a:lnTo>
+                    <a:pt x="3581126" y="2270512"/>
+                  </a:lnTo>
+                  <a:lnTo>
+                    <a:pt x="3652748" y="2276310"/>
+                  </a:lnTo>
+                  <a:lnTo>
+                    <a:pt x="3724371" y="2282066"/>
+                  </a:lnTo>
+                  <a:lnTo>
+                    <a:pt x="3795993" y="2287780"/>
+                  </a:lnTo>
+                  <a:lnTo>
+                    <a:pt x="3867616" y="2293453"/>
+                  </a:lnTo>
+                  <a:lnTo>
+                    <a:pt x="3939238" y="2299083"/>
+                  </a:lnTo>
+                  <a:lnTo>
+                    <a:pt x="4010861" y="2304673"/>
+                  </a:lnTo>
+                  <a:lnTo>
+                    <a:pt x="4082483" y="2310222"/>
+                  </a:lnTo>
+                  <a:lnTo>
+                    <a:pt x="4154106" y="2315730"/>
+                  </a:lnTo>
+                  <a:lnTo>
+                    <a:pt x="4225729" y="2321198"/>
+                  </a:lnTo>
+                  <a:lnTo>
+                    <a:pt x="4297351" y="2326626"/>
+                  </a:lnTo>
+                  <a:lnTo>
+                    <a:pt x="4368974" y="2332014"/>
+                  </a:lnTo>
+                  <a:lnTo>
+                    <a:pt x="4440596" y="2337362"/>
+                  </a:lnTo>
+                  <a:lnTo>
+                    <a:pt x="4512219" y="2342672"/>
+                  </a:lnTo>
+                  <a:lnTo>
+                    <a:pt x="4583841" y="2347943"/>
+                  </a:lnTo>
+                  <a:lnTo>
+                    <a:pt x="4655464" y="2353175"/>
+                  </a:lnTo>
+                  <a:lnTo>
+                    <a:pt x="4727086" y="2358369"/>
+                  </a:lnTo>
+                  <a:lnTo>
+                    <a:pt x="4798709" y="2363525"/>
+                  </a:lnTo>
+                  <a:lnTo>
+                    <a:pt x="4870331" y="2368644"/>
+                  </a:lnTo>
+                  <a:lnTo>
+                    <a:pt x="4941954" y="2373725"/>
+                  </a:lnTo>
+                  <a:lnTo>
+                    <a:pt x="5013576" y="2378768"/>
+                  </a:lnTo>
+                  <a:lnTo>
+                    <a:pt x="5085199" y="2383775"/>
+                  </a:lnTo>
+                  <a:lnTo>
+                    <a:pt x="5156821" y="2388745"/>
+                  </a:lnTo>
+                  <a:lnTo>
+                    <a:pt x="5228444" y="2393679"/>
+                  </a:lnTo>
+                  <a:lnTo>
+                    <a:pt x="5300066" y="2398577"/>
+                  </a:lnTo>
+                  <a:lnTo>
+                    <a:pt x="5371689" y="2403439"/>
+                  </a:lnTo>
+                  <a:lnTo>
+                    <a:pt x="5443311" y="2408266"/>
+                  </a:lnTo>
+                  <a:lnTo>
+                    <a:pt x="5514934" y="2413057"/>
+                  </a:lnTo>
+                  <a:lnTo>
+                    <a:pt x="5586557" y="2417813"/>
+                  </a:lnTo>
+                  <a:lnTo>
+                    <a:pt x="5658179" y="2422534"/>
+                  </a:lnTo>
+                  <a:lnTo>
+                    <a:pt x="5729802" y="2427221"/>
+                  </a:lnTo>
+                  <a:lnTo>
+                    <a:pt x="5801424" y="2431874"/>
+                  </a:lnTo>
+                  <a:lnTo>
+                    <a:pt x="5873047" y="2436492"/>
+                  </a:lnTo>
+                  <a:lnTo>
+                    <a:pt x="5944669" y="2441077"/>
+                  </a:lnTo>
+                  <a:lnTo>
+                    <a:pt x="6016292" y="2445628"/>
+                  </a:lnTo>
+                  <a:lnTo>
+                    <a:pt x="6087914" y="2450146"/>
+                  </a:lnTo>
+                  <a:lnTo>
+                    <a:pt x="6159537" y="2454631"/>
+                  </a:lnTo>
+                  <a:lnTo>
+                    <a:pt x="6231159" y="2459083"/>
+                  </a:lnTo>
+                  <a:lnTo>
+                    <a:pt x="6302782" y="2463503"/>
+                  </a:lnTo>
+                  <a:lnTo>
+                    <a:pt x="6374404" y="2467890"/>
+                  </a:lnTo>
+                  <a:lnTo>
+                    <a:pt x="6446027" y="2472245"/>
+                  </a:lnTo>
+                  <a:lnTo>
+                    <a:pt x="6517649" y="2476568"/>
+                  </a:lnTo>
+                  <a:lnTo>
+                    <a:pt x="6589272" y="2480860"/>
+                  </a:lnTo>
+                  <a:lnTo>
+                    <a:pt x="6660894" y="2485120"/>
+                  </a:lnTo>
+                  <a:lnTo>
+                    <a:pt x="6732517" y="2489349"/>
+                  </a:lnTo>
+                  <a:lnTo>
+                    <a:pt x="6804139" y="2493548"/>
+                  </a:lnTo>
+                  <a:lnTo>
+                    <a:pt x="6875762" y="2497715"/>
+                  </a:lnTo>
+                  <a:lnTo>
+                    <a:pt x="6947385" y="2501852"/>
+                  </a:lnTo>
+                  <a:lnTo>
+                    <a:pt x="7019007" y="2505959"/>
+                  </a:lnTo>
+                  <a:lnTo>
+                    <a:pt x="7090630" y="2510036"/>
+                  </a:lnTo>
+                  <a:lnTo>
+                    <a:pt x="7090630" y="2902915"/>
+                  </a:lnTo>
+                  <a:lnTo>
+                    <a:pt x="7019007" y="2898061"/>
+                  </a:lnTo>
+                  <a:lnTo>
+                    <a:pt x="6947385" y="2893061"/>
+                  </a:lnTo>
+                  <a:lnTo>
+                    <a:pt x="6875762" y="2887910"/>
+                  </a:lnTo>
+                  <a:lnTo>
+                    <a:pt x="6804139" y="2882603"/>
+                  </a:lnTo>
+                  <a:lnTo>
+                    <a:pt x="6732517" y="2877135"/>
+                  </a:lnTo>
+                  <a:lnTo>
+                    <a:pt x="6660894" y="2871502"/>
+                  </a:lnTo>
+                  <a:lnTo>
+                    <a:pt x="6589272" y="2865699"/>
+                  </a:lnTo>
+                  <a:lnTo>
+                    <a:pt x="6517649" y="2859720"/>
+                  </a:lnTo>
+                  <a:lnTo>
+                    <a:pt x="6446027" y="2853561"/>
+                  </a:lnTo>
+                  <a:lnTo>
+                    <a:pt x="6374404" y="2847215"/>
+                  </a:lnTo>
+                  <a:lnTo>
+                    <a:pt x="6302782" y="2840678"/>
+                  </a:lnTo>
+                  <a:lnTo>
+                    <a:pt x="6231159" y="2833943"/>
+                  </a:lnTo>
+                  <a:lnTo>
+                    <a:pt x="6159537" y="2827004"/>
+                  </a:lnTo>
+                  <a:lnTo>
+                    <a:pt x="6087914" y="2819855"/>
+                  </a:lnTo>
+                  <a:lnTo>
+                    <a:pt x="6016292" y="2812490"/>
+                  </a:lnTo>
+                  <a:lnTo>
+                    <a:pt x="5944669" y="2804903"/>
+                  </a:lnTo>
+                  <a:lnTo>
+                    <a:pt x="5873047" y="2797086"/>
+                  </a:lnTo>
+                  <a:lnTo>
+                    <a:pt x="5801424" y="2789033"/>
+                  </a:lnTo>
+                  <a:lnTo>
+                    <a:pt x="5729802" y="2780737"/>
+                  </a:lnTo>
+                  <a:lnTo>
+                    <a:pt x="5658179" y="2772189"/>
+                  </a:lnTo>
+                  <a:lnTo>
+                    <a:pt x="5586557" y="2763383"/>
+                  </a:lnTo>
+                  <a:lnTo>
+                    <a:pt x="5514934" y="2754311"/>
+                  </a:lnTo>
+                  <a:lnTo>
+                    <a:pt x="5443311" y="2744965"/>
+                  </a:lnTo>
+                  <a:lnTo>
+                    <a:pt x="5371689" y="2735336"/>
+                  </a:lnTo>
+                  <a:lnTo>
+                    <a:pt x="5300066" y="2725416"/>
+                  </a:lnTo>
+                  <a:lnTo>
+                    <a:pt x="5228444" y="2715196"/>
+                  </a:lnTo>
+                  <a:lnTo>
+                    <a:pt x="5156821" y="2704667"/>
+                  </a:lnTo>
+                  <a:lnTo>
+                    <a:pt x="5085199" y="2693820"/>
+                  </a:lnTo>
+                  <a:lnTo>
+                    <a:pt x="5013576" y="2682644"/>
+                  </a:lnTo>
+                  <a:lnTo>
+                    <a:pt x="4941954" y="2671131"/>
+                  </a:lnTo>
+                  <a:lnTo>
+                    <a:pt x="4870331" y="2659270"/>
+                  </a:lnTo>
+                  <a:lnTo>
+                    <a:pt x="4798709" y="2647050"/>
+                  </a:lnTo>
+                  <a:lnTo>
+                    <a:pt x="4727086" y="2634461"/>
+                  </a:lnTo>
+                  <a:lnTo>
+                    <a:pt x="4655464" y="2621491"/>
+                  </a:lnTo>
+                  <a:lnTo>
+                    <a:pt x="4583841" y="2608129"/>
+                  </a:lnTo>
+                  <a:lnTo>
+                    <a:pt x="4512219" y="2594363"/>
+                  </a:lnTo>
+                  <a:lnTo>
+                    <a:pt x="4440596" y="2580181"/>
+                  </a:lnTo>
+                  <a:lnTo>
+                    <a:pt x="4368974" y="2565569"/>
+                  </a:lnTo>
+                  <a:lnTo>
+                    <a:pt x="4297351" y="2550517"/>
+                  </a:lnTo>
+                  <a:lnTo>
+                    <a:pt x="4225729" y="2535009"/>
+                  </a:lnTo>
+                  <a:lnTo>
+                    <a:pt x="4154106" y="2519032"/>
+                  </a:lnTo>
+                  <a:lnTo>
+                    <a:pt x="4082483" y="2502572"/>
+                  </a:lnTo>
+                  <a:lnTo>
+                    <a:pt x="4010861" y="2485615"/>
+                  </a:lnTo>
+                  <a:lnTo>
+                    <a:pt x="3939238" y="2468145"/>
+                  </a:lnTo>
+                  <a:lnTo>
+                    <a:pt x="3867616" y="2450146"/>
+                  </a:lnTo>
+                  <a:lnTo>
+                    <a:pt x="3795993" y="2431604"/>
+                  </a:lnTo>
+                  <a:lnTo>
+                    <a:pt x="3724371" y="2412501"/>
+                  </a:lnTo>
+                  <a:lnTo>
+                    <a:pt x="3652748" y="2392820"/>
+                  </a:lnTo>
+                  <a:lnTo>
+                    <a:pt x="3581126" y="2372544"/>
+                  </a:lnTo>
+                  <a:lnTo>
+                    <a:pt x="3509503" y="2351656"/>
+                  </a:lnTo>
+                  <a:lnTo>
+                    <a:pt x="3437881" y="2330135"/>
+                  </a:lnTo>
+                  <a:lnTo>
+                    <a:pt x="3366258" y="2307964"/>
+                  </a:lnTo>
+                  <a:lnTo>
+                    <a:pt x="3294636" y="2285123"/>
+                  </a:lnTo>
+                  <a:lnTo>
+                    <a:pt x="3223013" y="2261591"/>
+                  </a:lnTo>
+                  <a:lnTo>
+                    <a:pt x="3151391" y="2237348"/>
+                  </a:lnTo>
+                  <a:lnTo>
+                    <a:pt x="3079768" y="2228708"/>
+                  </a:lnTo>
+                  <a:lnTo>
+                    <a:pt x="3008146" y="2222559"/>
+                  </a:lnTo>
+                  <a:lnTo>
+                    <a:pt x="2936523" y="2216365"/>
+                  </a:lnTo>
+                  <a:lnTo>
+                    <a:pt x="2864901" y="2210125"/>
+                  </a:lnTo>
+                  <a:lnTo>
+                    <a:pt x="2793278" y="2203838"/>
+                  </a:lnTo>
+                  <a:lnTo>
+                    <a:pt x="2721655" y="2197506"/>
+                  </a:lnTo>
+                  <a:lnTo>
+                    <a:pt x="2650033" y="2191127"/>
+                  </a:lnTo>
+                  <a:lnTo>
+                    <a:pt x="2578410" y="2184701"/>
+                  </a:lnTo>
+                  <a:lnTo>
+                    <a:pt x="2506788" y="2178228"/>
+                  </a:lnTo>
+                  <a:lnTo>
+                    <a:pt x="2435165" y="2171707"/>
+                  </a:lnTo>
+                  <a:lnTo>
+                    <a:pt x="2363543" y="2165138"/>
+                  </a:lnTo>
+                  <a:lnTo>
+                    <a:pt x="2291920" y="2158520"/>
+                  </a:lnTo>
+                  <a:lnTo>
+                    <a:pt x="2220298" y="2151854"/>
+                  </a:lnTo>
+                  <a:lnTo>
+                    <a:pt x="2148675" y="2145138"/>
+                  </a:lnTo>
+                  <a:lnTo>
+                    <a:pt x="2077053" y="2138374"/>
+                  </a:lnTo>
+                  <a:lnTo>
+                    <a:pt x="2005430" y="2131559"/>
+                  </a:lnTo>
+                  <a:lnTo>
+                    <a:pt x="1933808" y="2124694"/>
+                  </a:lnTo>
+                  <a:lnTo>
+                    <a:pt x="1862185" y="2117779"/>
+                  </a:lnTo>
+                  <a:lnTo>
+                    <a:pt x="1790563" y="2110812"/>
+                  </a:lnTo>
+                  <a:lnTo>
+                    <a:pt x="1718940" y="2103795"/>
+                  </a:lnTo>
+                  <a:lnTo>
+                    <a:pt x="1647318" y="2096725"/>
+                  </a:lnTo>
+                  <a:lnTo>
+                    <a:pt x="1575695" y="2089604"/>
+                  </a:lnTo>
+                  <a:lnTo>
+                    <a:pt x="1504073" y="2082430"/>
+                  </a:lnTo>
+                  <a:lnTo>
+                    <a:pt x="1432450" y="2075203"/>
+                  </a:lnTo>
+                  <a:lnTo>
+                    <a:pt x="1360827" y="2067923"/>
+                  </a:lnTo>
+                  <a:lnTo>
+                    <a:pt x="1289205" y="2060590"/>
+                  </a:lnTo>
+                  <a:lnTo>
+                    <a:pt x="1217582" y="2053202"/>
+                  </a:lnTo>
+                  <a:lnTo>
+                    <a:pt x="1145960" y="2045760"/>
+                  </a:lnTo>
+                  <a:lnTo>
+                    <a:pt x="1074337" y="2038263"/>
+                  </a:lnTo>
+                  <a:lnTo>
+                    <a:pt x="1002715" y="2030711"/>
+                  </a:lnTo>
+                  <a:lnTo>
+                    <a:pt x="931092" y="2023103"/>
+                  </a:lnTo>
+                  <a:lnTo>
+                    <a:pt x="859470" y="2015439"/>
+                  </a:lnTo>
+                  <a:lnTo>
+                    <a:pt x="787847" y="2007719"/>
+                  </a:lnTo>
+                  <a:lnTo>
+                    <a:pt x="716225" y="1999942"/>
+                  </a:lnTo>
+                  <a:lnTo>
+                    <a:pt x="644602" y="1992108"/>
+                  </a:lnTo>
+                  <a:lnTo>
+                    <a:pt x="572980" y="1984215"/>
+                  </a:lnTo>
+                  <a:lnTo>
+                    <a:pt x="501357" y="1976265"/>
+                  </a:lnTo>
+                  <a:lnTo>
+                    <a:pt x="429735" y="1968256"/>
+                  </a:lnTo>
+                  <a:lnTo>
+                    <a:pt x="358112" y="1960189"/>
+                  </a:lnTo>
+                  <a:lnTo>
+                    <a:pt x="286490" y="1952061"/>
+                  </a:lnTo>
+                  <a:lnTo>
+                    <a:pt x="214867" y="1943874"/>
+                  </a:lnTo>
+                  <a:lnTo>
+                    <a:pt x="143245" y="1935627"/>
+                  </a:lnTo>
+                  <a:lnTo>
+                    <a:pt x="71622" y="1927318"/>
+                  </a:lnTo>
+                  <a:lnTo>
+                    <a:pt x="0" y="1918949"/>
                   </a:lnTo>
                   <a:close/>
                 </a:path>
@@ -4020,312 +4020,312 @@
           </p:nvSpPr>
           <p:spPr>
             <a:xfrm>
-              <a:off x="1172049" y="2478906"/>
-              <a:ext cx="7090630" cy="2527474"/>
+              <a:off x="1172049" y="2493804"/>
+              <a:ext cx="7090630" cy="2510036"/>
             </a:xfrm>
             <a:custGeom>
               <a:avLst/>
               <a:pathLst>
-                <a:path w="7090630" h="2527474">
+                <a:path w="7090630" h="2510036">
                   <a:moveTo>
                     <a:pt x="0" y="0"/>
                   </a:moveTo>
                   <a:lnTo>
-                    <a:pt x="71622" y="90669"/>
-                  </a:lnTo>
-                  <a:lnTo>
-                    <a:pt x="143245" y="178669"/>
-                  </a:lnTo>
-                  <a:lnTo>
-                    <a:pt x="214867" y="264076"/>
-                  </a:lnTo>
-                  <a:lnTo>
-                    <a:pt x="286490" y="346968"/>
-                  </a:lnTo>
-                  <a:lnTo>
-                    <a:pt x="358112" y="427418"/>
-                  </a:lnTo>
-                  <a:lnTo>
-                    <a:pt x="429735" y="505498"/>
-                  </a:lnTo>
-                  <a:lnTo>
-                    <a:pt x="501357" y="581279"/>
-                  </a:lnTo>
-                  <a:lnTo>
-                    <a:pt x="572980" y="654828"/>
-                  </a:lnTo>
-                  <a:lnTo>
-                    <a:pt x="644602" y="726211"/>
-                  </a:lnTo>
-                  <a:lnTo>
-                    <a:pt x="716225" y="795491"/>
-                  </a:lnTo>
-                  <a:lnTo>
-                    <a:pt x="787847" y="862730"/>
-                  </a:lnTo>
-                  <a:lnTo>
-                    <a:pt x="859470" y="927989"/>
-                  </a:lnTo>
-                  <a:lnTo>
-                    <a:pt x="931092" y="991326"/>
-                  </a:lnTo>
-                  <a:lnTo>
-                    <a:pt x="1002715" y="1052797"/>
-                  </a:lnTo>
-                  <a:lnTo>
-                    <a:pt x="1074337" y="1112457"/>
-                  </a:lnTo>
-                  <a:lnTo>
-                    <a:pt x="1145960" y="1170361"/>
-                  </a:lnTo>
-                  <a:lnTo>
-                    <a:pt x="1217582" y="1226559"/>
-                  </a:lnTo>
-                  <a:lnTo>
-                    <a:pt x="1289205" y="1281101"/>
-                  </a:lnTo>
-                  <a:lnTo>
-                    <a:pt x="1360827" y="1334038"/>
-                  </a:lnTo>
-                  <a:lnTo>
-                    <a:pt x="1432450" y="1385415"/>
-                  </a:lnTo>
-                  <a:lnTo>
-                    <a:pt x="1504073" y="1435278"/>
-                  </a:lnTo>
-                  <a:lnTo>
-                    <a:pt x="1575695" y="1483673"/>
-                  </a:lnTo>
-                  <a:lnTo>
-                    <a:pt x="1647318" y="1530643"/>
-                  </a:lnTo>
-                  <a:lnTo>
-                    <a:pt x="1718940" y="1576229"/>
-                  </a:lnTo>
-                  <a:lnTo>
-                    <a:pt x="1790563" y="1620472"/>
-                  </a:lnTo>
-                  <a:lnTo>
-                    <a:pt x="1862185" y="1663413"/>
-                  </a:lnTo>
-                  <a:lnTo>
-                    <a:pt x="1933808" y="1705088"/>
-                  </a:lnTo>
-                  <a:lnTo>
-                    <a:pt x="2005430" y="1745536"/>
-                  </a:lnTo>
-                  <a:lnTo>
-                    <a:pt x="2077053" y="1784793"/>
-                  </a:lnTo>
-                  <a:lnTo>
-                    <a:pt x="2148675" y="1822893"/>
-                  </a:lnTo>
-                  <a:lnTo>
-                    <a:pt x="2220298" y="1859871"/>
-                  </a:lnTo>
-                  <a:lnTo>
-                    <a:pt x="2291920" y="1895760"/>
-                  </a:lnTo>
-                  <a:lnTo>
-                    <a:pt x="2363543" y="1930592"/>
-                  </a:lnTo>
-                  <a:lnTo>
-                    <a:pt x="2435165" y="1964398"/>
-                  </a:lnTo>
-                  <a:lnTo>
-                    <a:pt x="2506788" y="1997209"/>
-                  </a:lnTo>
-                  <a:lnTo>
-                    <a:pt x="2578410" y="2029052"/>
-                  </a:lnTo>
-                  <a:lnTo>
-                    <a:pt x="2650033" y="2059958"/>
-                  </a:lnTo>
-                  <a:lnTo>
-                    <a:pt x="2721655" y="2089954"/>
-                  </a:lnTo>
-                  <a:lnTo>
-                    <a:pt x="2793278" y="2119066"/>
-                  </a:lnTo>
-                  <a:lnTo>
-                    <a:pt x="2864901" y="2147321"/>
-                  </a:lnTo>
-                  <a:lnTo>
-                    <a:pt x="2936523" y="2174743"/>
-                  </a:lnTo>
-                  <a:lnTo>
-                    <a:pt x="3008146" y="2201358"/>
-                  </a:lnTo>
-                  <a:lnTo>
-                    <a:pt x="3079768" y="2227189"/>
-                  </a:lnTo>
-                  <a:lnTo>
-                    <a:pt x="3151391" y="2249720"/>
-                  </a:lnTo>
-                  <a:lnTo>
-                    <a:pt x="3223013" y="2255848"/>
-                  </a:lnTo>
-                  <a:lnTo>
-                    <a:pt x="3294636" y="2261931"/>
-                  </a:lnTo>
-                  <a:lnTo>
-                    <a:pt x="3366258" y="2267969"/>
-                  </a:lnTo>
-                  <a:lnTo>
-                    <a:pt x="3437881" y="2273962"/>
-                  </a:lnTo>
-                  <a:lnTo>
-                    <a:pt x="3509503" y="2279911"/>
-                  </a:lnTo>
-                  <a:lnTo>
-                    <a:pt x="3581126" y="2285816"/>
-                  </a:lnTo>
-                  <a:lnTo>
-                    <a:pt x="3652748" y="2291677"/>
-                  </a:lnTo>
-                  <a:lnTo>
-                    <a:pt x="3724371" y="2297495"/>
-                  </a:lnTo>
-                  <a:lnTo>
-                    <a:pt x="3795993" y="2303270"/>
-                  </a:lnTo>
-                  <a:lnTo>
-                    <a:pt x="3867616" y="2309002"/>
-                  </a:lnTo>
-                  <a:lnTo>
-                    <a:pt x="3939238" y="2314691"/>
-                  </a:lnTo>
-                  <a:lnTo>
-                    <a:pt x="4010861" y="2320339"/>
-                  </a:lnTo>
-                  <a:lnTo>
-                    <a:pt x="4082483" y="2325945"/>
-                  </a:lnTo>
-                  <a:lnTo>
-                    <a:pt x="4154106" y="2331509"/>
-                  </a:lnTo>
-                  <a:lnTo>
-                    <a:pt x="4225729" y="2337033"/>
-                  </a:lnTo>
-                  <a:lnTo>
-                    <a:pt x="4297351" y="2342515"/>
-                  </a:lnTo>
-                  <a:lnTo>
-                    <a:pt x="4368974" y="2347957"/>
-                  </a:lnTo>
-                  <a:lnTo>
-                    <a:pt x="4440596" y="2353359"/>
-                  </a:lnTo>
-                  <a:lnTo>
-                    <a:pt x="4512219" y="2358720"/>
-                  </a:lnTo>
-                  <a:lnTo>
-                    <a:pt x="4583841" y="2364042"/>
-                  </a:lnTo>
-                  <a:lnTo>
-                    <a:pt x="4655464" y="2369325"/>
-                  </a:lnTo>
-                  <a:lnTo>
-                    <a:pt x="4727086" y="2374568"/>
-                  </a:lnTo>
-                  <a:lnTo>
-                    <a:pt x="4798709" y="2379773"/>
-                  </a:lnTo>
-                  <a:lnTo>
-                    <a:pt x="4870331" y="2384940"/>
-                  </a:lnTo>
-                  <a:lnTo>
-                    <a:pt x="4941954" y="2390068"/>
-                  </a:lnTo>
-                  <a:lnTo>
-                    <a:pt x="5013576" y="2395158"/>
-                  </a:lnTo>
-                  <a:lnTo>
-                    <a:pt x="5085199" y="2400210"/>
-                  </a:lnTo>
-                  <a:lnTo>
-                    <a:pt x="5156821" y="2405226"/>
-                  </a:lnTo>
-                  <a:lnTo>
-                    <a:pt x="5228444" y="2410204"/>
-                  </a:lnTo>
-                  <a:lnTo>
-                    <a:pt x="5300066" y="2415145"/>
-                  </a:lnTo>
-                  <a:lnTo>
-                    <a:pt x="5371689" y="2420050"/>
-                  </a:lnTo>
-                  <a:lnTo>
-                    <a:pt x="5443311" y="2424918"/>
-                  </a:lnTo>
-                  <a:lnTo>
-                    <a:pt x="5514934" y="2429751"/>
-                  </a:lnTo>
-                  <a:lnTo>
-                    <a:pt x="5586557" y="2434547"/>
-                  </a:lnTo>
-                  <a:lnTo>
-                    <a:pt x="5658179" y="2439309"/>
-                  </a:lnTo>
-                  <a:lnTo>
-                    <a:pt x="5729802" y="2444035"/>
-                  </a:lnTo>
-                  <a:lnTo>
-                    <a:pt x="5801424" y="2448726"/>
-                  </a:lnTo>
-                  <a:lnTo>
-                    <a:pt x="5873047" y="2453382"/>
-                  </a:lnTo>
-                  <a:lnTo>
-                    <a:pt x="5944669" y="2458004"/>
-                  </a:lnTo>
-                  <a:lnTo>
-                    <a:pt x="6016292" y="2462592"/>
-                  </a:lnTo>
-                  <a:lnTo>
-                    <a:pt x="6087914" y="2467146"/>
-                  </a:lnTo>
-                  <a:lnTo>
-                    <a:pt x="6159537" y="2471666"/>
-                  </a:lnTo>
-                  <a:lnTo>
-                    <a:pt x="6231159" y="2476152"/>
-                  </a:lnTo>
-                  <a:lnTo>
-                    <a:pt x="6302782" y="2480606"/>
-                  </a:lnTo>
-                  <a:lnTo>
-                    <a:pt x="6374404" y="2485027"/>
-                  </a:lnTo>
-                  <a:lnTo>
-                    <a:pt x="6446027" y="2489415"/>
-                  </a:lnTo>
-                  <a:lnTo>
-                    <a:pt x="6517649" y="2493770"/>
-                  </a:lnTo>
-                  <a:lnTo>
-                    <a:pt x="6589272" y="2498093"/>
-                  </a:lnTo>
-                  <a:lnTo>
-                    <a:pt x="6660894" y="2502385"/>
-                  </a:lnTo>
-                  <a:lnTo>
-                    <a:pt x="6732517" y="2506644"/>
-                  </a:lnTo>
-                  <a:lnTo>
-                    <a:pt x="6804139" y="2510872"/>
-                  </a:lnTo>
-                  <a:lnTo>
-                    <a:pt x="6875762" y="2515069"/>
-                  </a:lnTo>
-                  <a:lnTo>
-                    <a:pt x="6947385" y="2519235"/>
-                  </a:lnTo>
-                  <a:lnTo>
-                    <a:pt x="7019007" y="2523370"/>
-                  </a:lnTo>
-                  <a:lnTo>
-                    <a:pt x="7090630" y="2527474"/>
+                    <a:pt x="71622" y="89902"/>
+                  </a:lnTo>
+                  <a:lnTo>
+                    <a:pt x="143245" y="177166"/>
+                  </a:lnTo>
+                  <a:lnTo>
+                    <a:pt x="214867" y="261868"/>
+                  </a:lnTo>
+                  <a:lnTo>
+                    <a:pt x="286490" y="344086"/>
+                  </a:lnTo>
+                  <a:lnTo>
+                    <a:pt x="358112" y="423890"/>
+                  </a:lnTo>
+                  <a:lnTo>
+                    <a:pt x="429735" y="501352"/>
+                  </a:lnTo>
+                  <a:lnTo>
+                    <a:pt x="501357" y="576541"/>
+                  </a:lnTo>
+                  <a:lnTo>
+                    <a:pt x="572980" y="649524"/>
+                  </a:lnTo>
+                  <a:lnTo>
+                    <a:pt x="644602" y="720365"/>
+                  </a:lnTo>
+                  <a:lnTo>
+                    <a:pt x="716225" y="789127"/>
+                  </a:lnTo>
+                  <a:lnTo>
+                    <a:pt x="787847" y="855870"/>
+                  </a:lnTo>
+                  <a:lnTo>
+                    <a:pt x="859470" y="920656"/>
+                  </a:lnTo>
+                  <a:lnTo>
+                    <a:pt x="931092" y="983540"/>
+                  </a:lnTo>
+                  <a:lnTo>
+                    <a:pt x="1002715" y="1044578"/>
+                  </a:lnTo>
+                  <a:lnTo>
+                    <a:pt x="1074337" y="1103825"/>
+                  </a:lnTo>
+                  <a:lnTo>
+                    <a:pt x="1145960" y="1161334"/>
+                  </a:lnTo>
+                  <a:lnTo>
+                    <a:pt x="1217582" y="1217154"/>
+                  </a:lnTo>
+                  <a:lnTo>
+                    <a:pt x="1289205" y="1271337"/>
+                  </a:lnTo>
+                  <a:lnTo>
+                    <a:pt x="1360827" y="1323930"/>
+                  </a:lnTo>
+                  <a:lnTo>
+                    <a:pt x="1432450" y="1374979"/>
+                  </a:lnTo>
+                  <a:lnTo>
+                    <a:pt x="1504073" y="1424530"/>
+                  </a:lnTo>
+                  <a:lnTo>
+                    <a:pt x="1575695" y="1472627"/>
+                  </a:lnTo>
+                  <a:lnTo>
+                    <a:pt x="1647318" y="1519312"/>
+                  </a:lnTo>
+                  <a:lnTo>
+                    <a:pt x="1718940" y="1564627"/>
+                  </a:lnTo>
+                  <a:lnTo>
+                    <a:pt x="1790563" y="1608613"/>
+                  </a:lnTo>
+                  <a:lnTo>
+                    <a:pt x="1862185" y="1651307"/>
+                  </a:lnTo>
+                  <a:lnTo>
+                    <a:pt x="1933808" y="1692749"/>
+                  </a:lnTo>
+                  <a:lnTo>
+                    <a:pt x="2005430" y="1732974"/>
+                  </a:lnTo>
+                  <a:lnTo>
+                    <a:pt x="2077053" y="1772019"/>
+                  </a:lnTo>
+                  <a:lnTo>
+                    <a:pt x="2148675" y="1809919"/>
+                  </a:lnTo>
+                  <a:lnTo>
+                    <a:pt x="2220298" y="1846706"/>
+                  </a:lnTo>
+                  <a:lnTo>
+                    <a:pt x="2291920" y="1882413"/>
+                  </a:lnTo>
+                  <a:lnTo>
+                    <a:pt x="2363543" y="1917072"/>
+                  </a:lnTo>
+                  <a:lnTo>
+                    <a:pt x="2435165" y="1950715"/>
+                  </a:lnTo>
+                  <a:lnTo>
+                    <a:pt x="2506788" y="1983370"/>
+                  </a:lnTo>
+                  <a:lnTo>
+                    <a:pt x="2578410" y="2015066"/>
+                  </a:lnTo>
+                  <a:lnTo>
+                    <a:pt x="2650033" y="2045833"/>
+                  </a:lnTo>
+                  <a:lnTo>
+                    <a:pt x="2721655" y="2075697"/>
+                  </a:lnTo>
+                  <a:lnTo>
+                    <a:pt x="2793278" y="2104684"/>
+                  </a:lnTo>
+                  <a:lnTo>
+                    <a:pt x="2864901" y="2132820"/>
+                  </a:lnTo>
+                  <a:lnTo>
+                    <a:pt x="2936523" y="2160131"/>
+                  </a:lnTo>
+                  <a:lnTo>
+                    <a:pt x="3008146" y="2186640"/>
+                  </a:lnTo>
+                  <a:lnTo>
+                    <a:pt x="3079768" y="2212372"/>
+                  </a:lnTo>
+                  <a:lnTo>
+                    <a:pt x="3151391" y="2234813"/>
+                  </a:lnTo>
+                  <a:lnTo>
+                    <a:pt x="3223013" y="2240872"/>
+                  </a:lnTo>
+                  <a:lnTo>
+                    <a:pt x="3294636" y="2246887"/>
+                  </a:lnTo>
+                  <a:lnTo>
+                    <a:pt x="3366258" y="2252859"/>
+                  </a:lnTo>
+                  <a:lnTo>
+                    <a:pt x="3437881" y="2258786"/>
+                  </a:lnTo>
+                  <a:lnTo>
+                    <a:pt x="3509503" y="2264671"/>
+                  </a:lnTo>
+                  <a:lnTo>
+                    <a:pt x="3581126" y="2270512"/>
+                  </a:lnTo>
+                  <a:lnTo>
+                    <a:pt x="3652748" y="2276310"/>
+                  </a:lnTo>
+                  <a:lnTo>
+                    <a:pt x="3724371" y="2282066"/>
+                  </a:lnTo>
+                  <a:lnTo>
+                    <a:pt x="3795993" y="2287780"/>
+                  </a:lnTo>
+                  <a:lnTo>
+                    <a:pt x="3867616" y="2293453"/>
+                  </a:lnTo>
+                  <a:lnTo>
+                    <a:pt x="3939238" y="2299083"/>
+                  </a:lnTo>
+                  <a:lnTo>
+                    <a:pt x="4010861" y="2304673"/>
+                  </a:lnTo>
+                  <a:lnTo>
+                    <a:pt x="4082483" y="2310222"/>
+                  </a:lnTo>
+                  <a:lnTo>
+                    <a:pt x="4154106" y="2315730"/>
+                  </a:lnTo>
+                  <a:lnTo>
+                    <a:pt x="4225729" y="2321198"/>
+                  </a:lnTo>
+                  <a:lnTo>
+                    <a:pt x="4297351" y="2326626"/>
+                  </a:lnTo>
+                  <a:lnTo>
+                    <a:pt x="4368974" y="2332014"/>
+                  </a:lnTo>
+                  <a:lnTo>
+                    <a:pt x="4440596" y="2337362"/>
+                  </a:lnTo>
+                  <a:lnTo>
+                    <a:pt x="4512219" y="2342672"/>
+                  </a:lnTo>
+                  <a:lnTo>
+                    <a:pt x="4583841" y="2347943"/>
+                  </a:lnTo>
+                  <a:lnTo>
+                    <a:pt x="4655464" y="2353175"/>
+                  </a:lnTo>
+                  <a:lnTo>
+                    <a:pt x="4727086" y="2358369"/>
+                  </a:lnTo>
+                  <a:lnTo>
+                    <a:pt x="4798709" y="2363525"/>
+                  </a:lnTo>
+                  <a:lnTo>
+                    <a:pt x="4870331" y="2368644"/>
+                  </a:lnTo>
+                  <a:lnTo>
+                    <a:pt x="4941954" y="2373725"/>
+                  </a:lnTo>
+                  <a:lnTo>
+                    <a:pt x="5013576" y="2378768"/>
+                  </a:lnTo>
+                  <a:lnTo>
+                    <a:pt x="5085199" y="2383775"/>
+                  </a:lnTo>
+                  <a:lnTo>
+                    <a:pt x="5156821" y="2388745"/>
+                  </a:lnTo>
+                  <a:lnTo>
+                    <a:pt x="5228444" y="2393679"/>
+                  </a:lnTo>
+                  <a:lnTo>
+                    <a:pt x="5300066" y="2398577"/>
+                  </a:lnTo>
+                  <a:lnTo>
+                    <a:pt x="5371689" y="2403439"/>
+                  </a:lnTo>
+                  <a:lnTo>
+                    <a:pt x="5443311" y="2408266"/>
+                  </a:lnTo>
+                  <a:lnTo>
+                    <a:pt x="5514934" y="2413057"/>
+                  </a:lnTo>
+                  <a:lnTo>
+                    <a:pt x="5586557" y="2417813"/>
+                  </a:lnTo>
+                  <a:lnTo>
+                    <a:pt x="5658179" y="2422534"/>
+                  </a:lnTo>
+                  <a:lnTo>
+                    <a:pt x="5729802" y="2427221"/>
+                  </a:lnTo>
+                  <a:lnTo>
+                    <a:pt x="5801424" y="2431874"/>
+                  </a:lnTo>
+                  <a:lnTo>
+                    <a:pt x="5873047" y="2436492"/>
+                  </a:lnTo>
+                  <a:lnTo>
+                    <a:pt x="5944669" y="2441077"/>
+                  </a:lnTo>
+                  <a:lnTo>
+                    <a:pt x="6016292" y="2445628"/>
+                  </a:lnTo>
+                  <a:lnTo>
+                    <a:pt x="6087914" y="2450146"/>
+                  </a:lnTo>
+                  <a:lnTo>
+                    <a:pt x="6159537" y="2454631"/>
+                  </a:lnTo>
+                  <a:lnTo>
+                    <a:pt x="6231159" y="2459083"/>
+                  </a:lnTo>
+                  <a:lnTo>
+                    <a:pt x="6302782" y="2463503"/>
+                  </a:lnTo>
+                  <a:lnTo>
+                    <a:pt x="6374404" y="2467890"/>
+                  </a:lnTo>
+                  <a:lnTo>
+                    <a:pt x="6446027" y="2472245"/>
+                  </a:lnTo>
+                  <a:lnTo>
+                    <a:pt x="6517649" y="2476568"/>
+                  </a:lnTo>
+                  <a:lnTo>
+                    <a:pt x="6589272" y="2480860"/>
+                  </a:lnTo>
+                  <a:lnTo>
+                    <a:pt x="6660894" y="2485120"/>
+                  </a:lnTo>
+                  <a:lnTo>
+                    <a:pt x="6732517" y="2489349"/>
+                  </a:lnTo>
+                  <a:lnTo>
+                    <a:pt x="6804139" y="2493548"/>
+                  </a:lnTo>
+                  <a:lnTo>
+                    <a:pt x="6875762" y="2497715"/>
+                  </a:lnTo>
+                  <a:lnTo>
+                    <a:pt x="6947385" y="2501852"/>
+                  </a:lnTo>
+                  <a:lnTo>
+                    <a:pt x="7019007" y="2505959"/>
+                  </a:lnTo>
+                  <a:lnTo>
+                    <a:pt x="7090630" y="2510036"/>
                   </a:lnTo>
                 </a:path>
               </a:pathLst>
@@ -4345,309 +4345,309 @@
           </p:nvSpPr>
           <p:spPr>
             <a:xfrm>
-              <a:off x="1172049" y="4408557"/>
-              <a:ext cx="7090630" cy="989138"/>
+              <a:off x="1172049" y="4412753"/>
+              <a:ext cx="7090630" cy="983965"/>
             </a:xfrm>
             <a:custGeom>
               <a:avLst/>
               <a:pathLst>
-                <a:path w="7090630" h="989138">
+                <a:path w="7090630" h="983965">
                   <a:moveTo>
-                    <a:pt x="7090630" y="989138"/>
+                    <a:pt x="7090630" y="983965"/>
                   </a:moveTo>
                   <a:lnTo>
-                    <a:pt x="7019007" y="984296"/>
-                  </a:lnTo>
-                  <a:lnTo>
-                    <a:pt x="6947385" y="979307"/>
-                  </a:lnTo>
-                  <a:lnTo>
-                    <a:pt x="6875762" y="974166"/>
-                  </a:lnTo>
-                  <a:lnTo>
-                    <a:pt x="6804139" y="968869"/>
-                  </a:lnTo>
-                  <a:lnTo>
-                    <a:pt x="6732517" y="963412"/>
-                  </a:lnTo>
-                  <a:lnTo>
-                    <a:pt x="6660894" y="957789"/>
-                  </a:lnTo>
-                  <a:lnTo>
-                    <a:pt x="6589272" y="951996"/>
-                  </a:lnTo>
-                  <a:lnTo>
-                    <a:pt x="6517649" y="946027"/>
-                  </a:lnTo>
-                  <a:lnTo>
-                    <a:pt x="6446027" y="939876"/>
-                  </a:lnTo>
-                  <a:lnTo>
-                    <a:pt x="6374404" y="933539"/>
-                  </a:lnTo>
-                  <a:lnTo>
-                    <a:pt x="6302782" y="927009"/>
-                  </a:lnTo>
-                  <a:lnTo>
-                    <a:pt x="6231159" y="920282"/>
-                  </a:lnTo>
-                  <a:lnTo>
-                    <a:pt x="6159537" y="913350"/>
-                  </a:lnTo>
-                  <a:lnTo>
-                    <a:pt x="6087914" y="906208"/>
-                  </a:lnTo>
-                  <a:lnTo>
-                    <a:pt x="6016292" y="898849"/>
-                  </a:lnTo>
-                  <a:lnTo>
-                    <a:pt x="5944669" y="891267"/>
-                  </a:lnTo>
-                  <a:lnTo>
-                    <a:pt x="5873047" y="883454"/>
-                  </a:lnTo>
-                  <a:lnTo>
-                    <a:pt x="5801424" y="875405"/>
-                  </a:lnTo>
-                  <a:lnTo>
-                    <a:pt x="5729802" y="867111"/>
-                  </a:lnTo>
-                  <a:lnTo>
-                    <a:pt x="5658179" y="858566"/>
-                  </a:lnTo>
-                  <a:lnTo>
-                    <a:pt x="5586557" y="849761"/>
-                  </a:lnTo>
-                  <a:lnTo>
-                    <a:pt x="5514934" y="840689"/>
-                  </a:lnTo>
-                  <a:lnTo>
-                    <a:pt x="5443311" y="831342"/>
-                  </a:lnTo>
-                  <a:lnTo>
-                    <a:pt x="5371689" y="821711"/>
-                  </a:lnTo>
-                  <a:lnTo>
-                    <a:pt x="5300066" y="811788"/>
-                  </a:lnTo>
-                  <a:lnTo>
-                    <a:pt x="5228444" y="801563"/>
-                  </a:lnTo>
-                  <a:lnTo>
-                    <a:pt x="5156821" y="791029"/>
-                  </a:lnTo>
-                  <a:lnTo>
-                    <a:pt x="5085199" y="780174"/>
-                  </a:lnTo>
-                  <a:lnTo>
-                    <a:pt x="5013576" y="768990"/>
-                  </a:lnTo>
-                  <a:lnTo>
-                    <a:pt x="4941954" y="757467"/>
-                  </a:lnTo>
-                  <a:lnTo>
-                    <a:pt x="4870331" y="745594"/>
-                  </a:lnTo>
-                  <a:lnTo>
-                    <a:pt x="4798709" y="733361"/>
-                  </a:lnTo>
-                  <a:lnTo>
-                    <a:pt x="4727086" y="720757"/>
-                  </a:lnTo>
-                  <a:lnTo>
-                    <a:pt x="4655464" y="707770"/>
-                  </a:lnTo>
-                  <a:lnTo>
-                    <a:pt x="4583841" y="694389"/>
-                  </a:lnTo>
-                  <a:lnTo>
-                    <a:pt x="4512219" y="680601"/>
-                  </a:lnTo>
-                  <a:lnTo>
-                    <a:pt x="4440596" y="666396"/>
-                  </a:lnTo>
-                  <a:lnTo>
-                    <a:pt x="4368974" y="651759"/>
-                  </a:lnTo>
-                  <a:lnTo>
-                    <a:pt x="4297351" y="636678"/>
-                  </a:lnTo>
-                  <a:lnTo>
-                    <a:pt x="4225729" y="621140"/>
-                  </a:lnTo>
-                  <a:lnTo>
-                    <a:pt x="4154106" y="605129"/>
-                  </a:lnTo>
-                  <a:lnTo>
-                    <a:pt x="4082483" y="588633"/>
-                  </a:lnTo>
-                  <a:lnTo>
-                    <a:pt x="4010861" y="571637"/>
-                  </a:lnTo>
-                  <a:lnTo>
-                    <a:pt x="3939238" y="554124"/>
-                  </a:lnTo>
-                  <a:lnTo>
-                    <a:pt x="3867616" y="536080"/>
-                  </a:lnTo>
-                  <a:lnTo>
-                    <a:pt x="3795993" y="517489"/>
-                  </a:lnTo>
-                  <a:lnTo>
-                    <a:pt x="3724371" y="498333"/>
-                  </a:lnTo>
-                  <a:lnTo>
-                    <a:pt x="3652748" y="478596"/>
-                  </a:lnTo>
-                  <a:lnTo>
-                    <a:pt x="3581126" y="458260"/>
-                  </a:lnTo>
-                  <a:lnTo>
-                    <a:pt x="3509503" y="437307"/>
-                  </a:lnTo>
-                  <a:lnTo>
-                    <a:pt x="3437881" y="415718"/>
-                  </a:lnTo>
-                  <a:lnTo>
-                    <a:pt x="3366258" y="393473"/>
-                  </a:lnTo>
-                  <a:lnTo>
-                    <a:pt x="3294636" y="370554"/>
-                  </a:lnTo>
-                  <a:lnTo>
-                    <a:pt x="3223013" y="346939"/>
-                  </a:lnTo>
-                  <a:lnTo>
-                    <a:pt x="3151391" y="322607"/>
-                  </a:lnTo>
-                  <a:lnTo>
-                    <a:pt x="3079768" y="313895"/>
-                  </a:lnTo>
-                  <a:lnTo>
-                    <a:pt x="3008146" y="307675"/>
-                  </a:lnTo>
-                  <a:lnTo>
-                    <a:pt x="2936523" y="301409"/>
-                  </a:lnTo>
-                  <a:lnTo>
-                    <a:pt x="2864901" y="295096"/>
-                  </a:lnTo>
-                  <a:lnTo>
-                    <a:pt x="2793278" y="288736"/>
-                  </a:lnTo>
-                  <a:lnTo>
-                    <a:pt x="2721655" y="282329"/>
-                  </a:lnTo>
-                  <a:lnTo>
-                    <a:pt x="2650033" y="275874"/>
-                  </a:lnTo>
-                  <a:lnTo>
-                    <a:pt x="2578410" y="269371"/>
-                  </a:lnTo>
-                  <a:lnTo>
-                    <a:pt x="2506788" y="262820"/>
-                  </a:lnTo>
-                  <a:lnTo>
-                    <a:pt x="2435165" y="256219"/>
-                  </a:lnTo>
-                  <a:lnTo>
-                    <a:pt x="2363543" y="249570"/>
-                  </a:lnTo>
-                  <a:lnTo>
-                    <a:pt x="2291920" y="242871"/>
-                  </a:lnTo>
-                  <a:lnTo>
-                    <a:pt x="2220298" y="236122"/>
-                  </a:lnTo>
-                  <a:lnTo>
-                    <a:pt x="2148675" y="229322"/>
-                  </a:lnTo>
-                  <a:lnTo>
-                    <a:pt x="2077053" y="222473"/>
-                  </a:lnTo>
-                  <a:lnTo>
-                    <a:pt x="2005430" y="215572"/>
-                  </a:lnTo>
-                  <a:lnTo>
-                    <a:pt x="1933808" y="208619"/>
-                  </a:lnTo>
-                  <a:lnTo>
-                    <a:pt x="1862185" y="201615"/>
-                  </a:lnTo>
-                  <a:lnTo>
-                    <a:pt x="1790563" y="194559"/>
-                  </a:lnTo>
-                  <a:lnTo>
-                    <a:pt x="1718940" y="187450"/>
-                  </a:lnTo>
-                  <a:lnTo>
-                    <a:pt x="1647318" y="180288"/>
-                  </a:lnTo>
-                  <a:lnTo>
-                    <a:pt x="1575695" y="173073"/>
-                  </a:lnTo>
-                  <a:lnTo>
-                    <a:pt x="1504073" y="165804"/>
-                  </a:lnTo>
-                  <a:lnTo>
-                    <a:pt x="1432450" y="158480"/>
-                  </a:lnTo>
-                  <a:lnTo>
-                    <a:pt x="1360827" y="151103"/>
-                  </a:lnTo>
-                  <a:lnTo>
-                    <a:pt x="1289205" y="143670"/>
-                  </a:lnTo>
-                  <a:lnTo>
-                    <a:pt x="1217582" y="136182"/>
-                  </a:lnTo>
-                  <a:lnTo>
-                    <a:pt x="1145960" y="128638"/>
-                  </a:lnTo>
-                  <a:lnTo>
-                    <a:pt x="1074337" y="121038"/>
-                  </a:lnTo>
-                  <a:lnTo>
-                    <a:pt x="1002715" y="113381"/>
-                  </a:lnTo>
-                  <a:lnTo>
-                    <a:pt x="931092" y="105667"/>
-                  </a:lnTo>
-                  <a:lnTo>
-                    <a:pt x="859470" y="97896"/>
-                  </a:lnTo>
-                  <a:lnTo>
-                    <a:pt x="787847" y="90067"/>
-                  </a:lnTo>
-                  <a:lnTo>
-                    <a:pt x="716225" y="82180"/>
-                  </a:lnTo>
-                  <a:lnTo>
-                    <a:pt x="644602" y="74233"/>
-                  </a:lnTo>
-                  <a:lnTo>
-                    <a:pt x="572980" y="66228"/>
-                  </a:lnTo>
-                  <a:lnTo>
-                    <a:pt x="501357" y="58163"/>
-                  </a:lnTo>
-                  <a:lnTo>
-                    <a:pt x="429735" y="50038"/>
-                  </a:lnTo>
-                  <a:lnTo>
-                    <a:pt x="358112" y="41852"/>
-                  </a:lnTo>
-                  <a:lnTo>
-                    <a:pt x="286490" y="33605"/>
-                  </a:lnTo>
-                  <a:lnTo>
-                    <a:pt x="214867" y="25297"/>
-                  </a:lnTo>
-                  <a:lnTo>
-                    <a:pt x="143245" y="16927"/>
-                  </a:lnTo>
-                  <a:lnTo>
-                    <a:pt x="71622" y="8495"/>
+                    <a:pt x="7019007" y="979112"/>
+                  </a:lnTo>
+                  <a:lnTo>
+                    <a:pt x="6947385" y="974112"/>
+                  </a:lnTo>
+                  <a:lnTo>
+                    <a:pt x="6875762" y="968960"/>
+                  </a:lnTo>
+                  <a:lnTo>
+                    <a:pt x="6804139" y="963653"/>
+                  </a:lnTo>
+                  <a:lnTo>
+                    <a:pt x="6732517" y="958186"/>
+                  </a:lnTo>
+                  <a:lnTo>
+                    <a:pt x="6660894" y="952553"/>
+                  </a:lnTo>
+                  <a:lnTo>
+                    <a:pt x="6589272" y="946749"/>
+                  </a:lnTo>
+                  <a:lnTo>
+                    <a:pt x="6517649" y="940771"/>
+                  </a:lnTo>
+                  <a:lnTo>
+                    <a:pt x="6446027" y="934611"/>
+                  </a:lnTo>
+                  <a:lnTo>
+                    <a:pt x="6374404" y="928266"/>
+                  </a:lnTo>
+                  <a:lnTo>
+                    <a:pt x="6302782" y="921728"/>
+                  </a:lnTo>
+                  <a:lnTo>
+                    <a:pt x="6231159" y="914993"/>
+                  </a:lnTo>
+                  <a:lnTo>
+                    <a:pt x="6159537" y="908054"/>
+                  </a:lnTo>
+                  <a:lnTo>
+                    <a:pt x="6087914" y="900906"/>
+                  </a:lnTo>
+                  <a:lnTo>
+                    <a:pt x="6016292" y="893541"/>
+                  </a:lnTo>
+                  <a:lnTo>
+                    <a:pt x="5944669" y="885954"/>
+                  </a:lnTo>
+                  <a:lnTo>
+                    <a:pt x="5873047" y="878137"/>
+                  </a:lnTo>
+                  <a:lnTo>
+                    <a:pt x="5801424" y="870084"/>
+                  </a:lnTo>
+                  <a:lnTo>
+                    <a:pt x="5729802" y="861787"/>
+                  </a:lnTo>
+                  <a:lnTo>
+                    <a:pt x="5658179" y="853240"/>
+                  </a:lnTo>
+                  <a:lnTo>
+                    <a:pt x="5586557" y="844434"/>
+                  </a:lnTo>
+                  <a:lnTo>
+                    <a:pt x="5514934" y="835362"/>
+                  </a:lnTo>
+                  <a:lnTo>
+                    <a:pt x="5443311" y="826015"/>
+                  </a:lnTo>
+                  <a:lnTo>
+                    <a:pt x="5371689" y="816386"/>
+                  </a:lnTo>
+                  <a:lnTo>
+                    <a:pt x="5300066" y="806466"/>
+                  </a:lnTo>
+                  <a:lnTo>
+                    <a:pt x="5228444" y="796246"/>
+                  </a:lnTo>
+                  <a:lnTo>
+                    <a:pt x="5156821" y="785717"/>
+                  </a:lnTo>
+                  <a:lnTo>
+                    <a:pt x="5085199" y="774870"/>
+                  </a:lnTo>
+                  <a:lnTo>
+                    <a:pt x="5013576" y="763695"/>
+                  </a:lnTo>
+                  <a:lnTo>
+                    <a:pt x="4941954" y="752182"/>
+                  </a:lnTo>
+                  <a:lnTo>
+                    <a:pt x="4870331" y="740320"/>
+                  </a:lnTo>
+                  <a:lnTo>
+                    <a:pt x="4798709" y="728101"/>
+                  </a:lnTo>
+                  <a:lnTo>
+                    <a:pt x="4727086" y="715511"/>
+                  </a:lnTo>
+                  <a:lnTo>
+                    <a:pt x="4655464" y="702541"/>
+                  </a:lnTo>
+                  <a:lnTo>
+                    <a:pt x="4583841" y="689179"/>
+                  </a:lnTo>
+                  <a:lnTo>
+                    <a:pt x="4512219" y="675413"/>
+                  </a:lnTo>
+                  <a:lnTo>
+                    <a:pt x="4440596" y="661231"/>
+                  </a:lnTo>
+                  <a:lnTo>
+                    <a:pt x="4368974" y="646620"/>
+                  </a:lnTo>
+                  <a:lnTo>
+                    <a:pt x="4297351" y="631567"/>
+                  </a:lnTo>
+                  <a:lnTo>
+                    <a:pt x="4225729" y="616059"/>
+                  </a:lnTo>
+                  <a:lnTo>
+                    <a:pt x="4154106" y="600082"/>
+                  </a:lnTo>
+                  <a:lnTo>
+                    <a:pt x="4082483" y="583623"/>
+                  </a:lnTo>
+                  <a:lnTo>
+                    <a:pt x="4010861" y="566665"/>
+                  </a:lnTo>
+                  <a:lnTo>
+                    <a:pt x="3939238" y="549195"/>
+                  </a:lnTo>
+                  <a:lnTo>
+                    <a:pt x="3867616" y="531197"/>
+                  </a:lnTo>
+                  <a:lnTo>
+                    <a:pt x="3795993" y="512654"/>
+                  </a:lnTo>
+                  <a:lnTo>
+                    <a:pt x="3724371" y="493551"/>
+                  </a:lnTo>
+                  <a:lnTo>
+                    <a:pt x="3652748" y="473870"/>
+                  </a:lnTo>
+                  <a:lnTo>
+                    <a:pt x="3581126" y="453595"/>
+                  </a:lnTo>
+                  <a:lnTo>
+                    <a:pt x="3509503" y="432706"/>
+                  </a:lnTo>
+                  <a:lnTo>
+                    <a:pt x="3437881" y="411186"/>
+                  </a:lnTo>
+                  <a:lnTo>
+                    <a:pt x="3366258" y="389015"/>
+                  </a:lnTo>
+                  <a:lnTo>
+                    <a:pt x="3294636" y="366174"/>
+                  </a:lnTo>
+                  <a:lnTo>
+                    <a:pt x="3223013" y="342642"/>
+                  </a:lnTo>
+                  <a:lnTo>
+                    <a:pt x="3151391" y="318399"/>
+                  </a:lnTo>
+                  <a:lnTo>
+                    <a:pt x="3079768" y="309759"/>
+                  </a:lnTo>
+                  <a:lnTo>
+                    <a:pt x="3008146" y="303610"/>
+                  </a:lnTo>
+                  <a:lnTo>
+                    <a:pt x="2936523" y="297415"/>
+                  </a:lnTo>
+                  <a:lnTo>
+                    <a:pt x="2864901" y="291175"/>
+                  </a:lnTo>
+                  <a:lnTo>
+                    <a:pt x="2793278" y="284889"/>
+                  </a:lnTo>
+                  <a:lnTo>
+                    <a:pt x="2721655" y="278557"/>
+                  </a:lnTo>
+                  <a:lnTo>
+                    <a:pt x="2650033" y="272178"/>
+                  </a:lnTo>
+                  <a:lnTo>
+                    <a:pt x="2578410" y="265751"/>
+                  </a:lnTo>
+                  <a:lnTo>
+                    <a:pt x="2506788" y="259278"/>
+                  </a:lnTo>
+                  <a:lnTo>
+                    <a:pt x="2435165" y="252757"/>
+                  </a:lnTo>
+                  <a:lnTo>
+                    <a:pt x="2363543" y="246188"/>
+                  </a:lnTo>
+                  <a:lnTo>
+                    <a:pt x="2291920" y="239570"/>
+                  </a:lnTo>
+                  <a:lnTo>
+                    <a:pt x="2220298" y="232904"/>
+                  </a:lnTo>
+                  <a:lnTo>
+                    <a:pt x="2148675" y="226189"/>
+                  </a:lnTo>
+                  <a:lnTo>
+                    <a:pt x="2077053" y="219424"/>
+                  </a:lnTo>
+                  <a:lnTo>
+                    <a:pt x="2005430" y="212609"/>
+                  </a:lnTo>
+                  <a:lnTo>
+                    <a:pt x="1933808" y="205745"/>
+                  </a:lnTo>
+                  <a:lnTo>
+                    <a:pt x="1862185" y="198829"/>
+                  </a:lnTo>
+                  <a:lnTo>
+                    <a:pt x="1790563" y="191863"/>
+                  </a:lnTo>
+                  <a:lnTo>
+                    <a:pt x="1718940" y="184845"/>
+                  </a:lnTo>
+                  <a:lnTo>
+                    <a:pt x="1647318" y="177776"/>
+                  </a:lnTo>
+                  <a:lnTo>
+                    <a:pt x="1575695" y="170654"/>
+                  </a:lnTo>
+                  <a:lnTo>
+                    <a:pt x="1504073" y="163480"/>
+                  </a:lnTo>
+                  <a:lnTo>
+                    <a:pt x="1432450" y="156254"/>
+                  </a:lnTo>
+                  <a:lnTo>
+                    <a:pt x="1360827" y="148974"/>
+                  </a:lnTo>
+                  <a:lnTo>
+                    <a:pt x="1289205" y="141640"/>
+                  </a:lnTo>
+                  <a:lnTo>
+                    <a:pt x="1217582" y="134252"/>
+                  </a:lnTo>
+                  <a:lnTo>
+                    <a:pt x="1145960" y="126810"/>
+                  </a:lnTo>
+                  <a:lnTo>
+                    <a:pt x="1074337" y="119313"/>
+                  </a:lnTo>
+                  <a:lnTo>
+                    <a:pt x="1002715" y="111761"/>
+                  </a:lnTo>
+                  <a:lnTo>
+                    <a:pt x="931092" y="104154"/>
+                  </a:lnTo>
+                  <a:lnTo>
+                    <a:pt x="859470" y="96490"/>
+                  </a:lnTo>
+                  <a:lnTo>
+                    <a:pt x="787847" y="88770"/>
+                  </a:lnTo>
+                  <a:lnTo>
+                    <a:pt x="716225" y="80992"/>
+                  </a:lnTo>
+                  <a:lnTo>
+                    <a:pt x="644602" y="73158"/>
+                  </a:lnTo>
+                  <a:lnTo>
+                    <a:pt x="572980" y="65266"/>
+                  </a:lnTo>
+                  <a:lnTo>
+                    <a:pt x="501357" y="57316"/>
+                  </a:lnTo>
+                  <a:lnTo>
+                    <a:pt x="429735" y="49307"/>
+                  </a:lnTo>
+                  <a:lnTo>
+                    <a:pt x="358112" y="41239"/>
+                  </a:lnTo>
+                  <a:lnTo>
+                    <a:pt x="286490" y="33112"/>
+                  </a:lnTo>
+                  <a:lnTo>
+                    <a:pt x="214867" y="24925"/>
+                  </a:lnTo>
+                  <a:lnTo>
+                    <a:pt x="143245" y="16677"/>
+                  </a:lnTo>
+                  <a:lnTo>
+                    <a:pt x="71622" y="8369"/>
                   </a:lnTo>
                   <a:lnTo>
                     <a:pt x="0" y="0"/>
@@ -4670,312 +4670,312 @@
           </p:nvSpPr>
           <p:spPr>
             <a:xfrm>
-              <a:off x="1172049" y="3676805"/>
-              <a:ext cx="7090630" cy="1583975"/>
+              <a:off x="1172049" y="3684791"/>
+              <a:ext cx="7090630" cy="1574400"/>
             </a:xfrm>
             <a:custGeom>
               <a:avLst/>
               <a:pathLst>
-                <a:path w="7090630" h="1583975">
+                <a:path w="7090630" h="1574400">
                   <a:moveTo>
                     <a:pt x="0" y="0"/>
                   </a:moveTo>
                   <a:lnTo>
-                    <a:pt x="71622" y="34763"/>
-                  </a:lnTo>
-                  <a:lnTo>
-                    <a:pt x="143245" y="68884"/>
-                  </a:lnTo>
-                  <a:lnTo>
-                    <a:pt x="214867" y="102374"/>
-                  </a:lnTo>
-                  <a:lnTo>
-                    <a:pt x="286490" y="135244"/>
-                  </a:lnTo>
-                  <a:lnTo>
-                    <a:pt x="358112" y="167508"/>
-                  </a:lnTo>
-                  <a:lnTo>
-                    <a:pt x="429735" y="199174"/>
-                  </a:lnTo>
-                  <a:lnTo>
-                    <a:pt x="501357" y="230256"/>
-                  </a:lnTo>
-                  <a:lnTo>
-                    <a:pt x="572980" y="260762"/>
-                  </a:lnTo>
-                  <a:lnTo>
-                    <a:pt x="644602" y="290705"/>
-                  </a:lnTo>
-                  <a:lnTo>
-                    <a:pt x="716225" y="320094"/>
-                  </a:lnTo>
-                  <a:lnTo>
-                    <a:pt x="787847" y="348940"/>
-                  </a:lnTo>
-                  <a:lnTo>
-                    <a:pt x="859470" y="377253"/>
-                  </a:lnTo>
-                  <a:lnTo>
-                    <a:pt x="931092" y="405042"/>
-                  </a:lnTo>
-                  <a:lnTo>
-                    <a:pt x="1002715" y="432317"/>
-                  </a:lnTo>
-                  <a:lnTo>
-                    <a:pt x="1074337" y="459089"/>
-                  </a:lnTo>
-                  <a:lnTo>
-                    <a:pt x="1145960" y="485365"/>
-                  </a:lnTo>
-                  <a:lnTo>
-                    <a:pt x="1217582" y="511155"/>
-                  </a:lnTo>
-                  <a:lnTo>
-                    <a:pt x="1289205" y="536469"/>
-                  </a:lnTo>
-                  <a:lnTo>
-                    <a:pt x="1360827" y="561315"/>
-                  </a:lnTo>
-                  <a:lnTo>
-                    <a:pt x="1432450" y="585701"/>
-                  </a:lnTo>
-                  <a:lnTo>
-                    <a:pt x="1504073" y="609637"/>
-                  </a:lnTo>
-                  <a:lnTo>
-                    <a:pt x="1575695" y="633130"/>
-                  </a:lnTo>
-                  <a:lnTo>
-                    <a:pt x="1647318" y="656189"/>
-                  </a:lnTo>
-                  <a:lnTo>
-                    <a:pt x="1718940" y="678822"/>
-                  </a:lnTo>
-                  <a:lnTo>
-                    <a:pt x="1790563" y="701036"/>
-                  </a:lnTo>
-                  <a:lnTo>
-                    <a:pt x="1862185" y="722839"/>
-                  </a:lnTo>
-                  <a:lnTo>
-                    <a:pt x="1933808" y="744240"/>
-                  </a:lnTo>
-                  <a:lnTo>
-                    <a:pt x="2005430" y="765244"/>
-                  </a:lnTo>
-                  <a:lnTo>
-                    <a:pt x="2077053" y="785861"/>
-                  </a:lnTo>
-                  <a:lnTo>
-                    <a:pt x="2148675" y="806096"/>
-                  </a:lnTo>
-                  <a:lnTo>
-                    <a:pt x="2220298" y="825958"/>
-                  </a:lnTo>
-                  <a:lnTo>
-                    <a:pt x="2291920" y="845452"/>
-                  </a:lnTo>
-                  <a:lnTo>
-                    <a:pt x="2363543" y="864585"/>
-                  </a:lnTo>
-                  <a:lnTo>
-                    <a:pt x="2435165" y="883365"/>
-                  </a:lnTo>
-                  <a:lnTo>
-                    <a:pt x="2506788" y="901798"/>
-                  </a:lnTo>
-                  <a:lnTo>
-                    <a:pt x="2578410" y="919890"/>
-                  </a:lnTo>
-                  <a:lnTo>
-                    <a:pt x="2650033" y="937648"/>
-                  </a:lnTo>
-                  <a:lnTo>
-                    <a:pt x="2721655" y="955077"/>
-                  </a:lnTo>
-                  <a:lnTo>
-                    <a:pt x="2793278" y="972184"/>
-                  </a:lnTo>
-                  <a:lnTo>
-                    <a:pt x="2864901" y="988975"/>
-                  </a:lnTo>
-                  <a:lnTo>
-                    <a:pt x="2936523" y="1005455"/>
-                  </a:lnTo>
-                  <a:lnTo>
-                    <a:pt x="3008146" y="1021631"/>
-                  </a:lnTo>
-                  <a:lnTo>
-                    <a:pt x="3079768" y="1037508"/>
-                  </a:lnTo>
-                  <a:lnTo>
-                    <a:pt x="3151391" y="1053091"/>
-                  </a:lnTo>
-                  <a:lnTo>
-                    <a:pt x="3223013" y="1068386"/>
-                  </a:lnTo>
-                  <a:lnTo>
-                    <a:pt x="3294636" y="1083398"/>
-                  </a:lnTo>
-                  <a:lnTo>
-                    <a:pt x="3366258" y="1098133"/>
-                  </a:lnTo>
-                  <a:lnTo>
-                    <a:pt x="3437881" y="1112596"/>
-                  </a:lnTo>
-                  <a:lnTo>
-                    <a:pt x="3509503" y="1126791"/>
-                  </a:lnTo>
-                  <a:lnTo>
-                    <a:pt x="3581126" y="1140723"/>
-                  </a:lnTo>
-                  <a:lnTo>
-                    <a:pt x="3652748" y="1154398"/>
-                  </a:lnTo>
-                  <a:lnTo>
-                    <a:pt x="3724371" y="1167821"/>
-                  </a:lnTo>
-                  <a:lnTo>
-                    <a:pt x="3795993" y="1180995"/>
-                  </a:lnTo>
-                  <a:lnTo>
-                    <a:pt x="3867616" y="1193925"/>
-                  </a:lnTo>
-                  <a:lnTo>
-                    <a:pt x="3939238" y="1206617"/>
-                  </a:lnTo>
-                  <a:lnTo>
-                    <a:pt x="4010861" y="1219074"/>
-                  </a:lnTo>
-                  <a:lnTo>
-                    <a:pt x="4082483" y="1231300"/>
-                  </a:lnTo>
-                  <a:lnTo>
-                    <a:pt x="4154106" y="1243301"/>
-                  </a:lnTo>
-                  <a:lnTo>
-                    <a:pt x="4225729" y="1255080"/>
-                  </a:lnTo>
-                  <a:lnTo>
-                    <a:pt x="4297351" y="1266641"/>
-                  </a:lnTo>
-                  <a:lnTo>
-                    <a:pt x="4368974" y="1277988"/>
-                  </a:lnTo>
-                  <a:lnTo>
-                    <a:pt x="4440596" y="1289125"/>
-                  </a:lnTo>
-                  <a:lnTo>
-                    <a:pt x="4512219" y="1300057"/>
-                  </a:lnTo>
-                  <a:lnTo>
-                    <a:pt x="4583841" y="1310787"/>
-                  </a:lnTo>
-                  <a:lnTo>
-                    <a:pt x="4655464" y="1321318"/>
-                  </a:lnTo>
-                  <a:lnTo>
-                    <a:pt x="4727086" y="1331654"/>
-                  </a:lnTo>
-                  <a:lnTo>
-                    <a:pt x="4798709" y="1341799"/>
-                  </a:lnTo>
-                  <a:lnTo>
-                    <a:pt x="4870331" y="1351757"/>
-                  </a:lnTo>
-                  <a:lnTo>
-                    <a:pt x="4941954" y="1361531"/>
-                  </a:lnTo>
-                  <a:lnTo>
-                    <a:pt x="5013576" y="1371124"/>
-                  </a:lnTo>
-                  <a:lnTo>
-                    <a:pt x="5085199" y="1380540"/>
-                  </a:lnTo>
-                  <a:lnTo>
-                    <a:pt x="5156821" y="1389781"/>
-                  </a:lnTo>
-                  <a:lnTo>
-                    <a:pt x="5228444" y="1398852"/>
-                  </a:lnTo>
-                  <a:lnTo>
-                    <a:pt x="5300066" y="1407755"/>
-                  </a:lnTo>
-                  <a:lnTo>
-                    <a:pt x="5371689" y="1416494"/>
-                  </a:lnTo>
-                  <a:lnTo>
-                    <a:pt x="5443311" y="1425071"/>
-                  </a:lnTo>
-                  <a:lnTo>
-                    <a:pt x="5514934" y="1433489"/>
-                  </a:lnTo>
-                  <a:lnTo>
-                    <a:pt x="5586557" y="1441752"/>
-                  </a:lnTo>
-                  <a:lnTo>
-                    <a:pt x="5658179" y="1449862"/>
-                  </a:lnTo>
-                  <a:lnTo>
-                    <a:pt x="5729802" y="1457822"/>
-                  </a:lnTo>
-                  <a:lnTo>
-                    <a:pt x="5801424" y="1465635"/>
-                  </a:lnTo>
-                  <a:lnTo>
-                    <a:pt x="5873047" y="1473303"/>
-                  </a:lnTo>
-                  <a:lnTo>
-                    <a:pt x="5944669" y="1480830"/>
-                  </a:lnTo>
-                  <a:lnTo>
-                    <a:pt x="6016292" y="1488218"/>
-                  </a:lnTo>
-                  <a:lnTo>
-                    <a:pt x="6087914" y="1495469"/>
-                  </a:lnTo>
-                  <a:lnTo>
-                    <a:pt x="6159537" y="1502586"/>
-                  </a:lnTo>
-                  <a:lnTo>
-                    <a:pt x="6231159" y="1509571"/>
-                  </a:lnTo>
-                  <a:lnTo>
-                    <a:pt x="6302782" y="1516427"/>
-                  </a:lnTo>
-                  <a:lnTo>
-                    <a:pt x="6374404" y="1523157"/>
-                  </a:lnTo>
-                  <a:lnTo>
-                    <a:pt x="6446027" y="1529762"/>
-                  </a:lnTo>
-                  <a:lnTo>
-                    <a:pt x="6517649" y="1536245"/>
-                  </a:lnTo>
-                  <a:lnTo>
-                    <a:pt x="6589272" y="1542608"/>
-                  </a:lnTo>
-                  <a:lnTo>
-                    <a:pt x="6660894" y="1548854"/>
-                  </a:lnTo>
-                  <a:lnTo>
-                    <a:pt x="6732517" y="1554984"/>
-                  </a:lnTo>
-                  <a:lnTo>
-                    <a:pt x="6804139" y="1561000"/>
-                  </a:lnTo>
-                  <a:lnTo>
-                    <a:pt x="6875762" y="1566906"/>
-                  </a:lnTo>
-                  <a:lnTo>
-                    <a:pt x="6947385" y="1572702"/>
-                  </a:lnTo>
-                  <a:lnTo>
-                    <a:pt x="7019007" y="1578391"/>
-                  </a:lnTo>
-                  <a:lnTo>
-                    <a:pt x="7090630" y="1583975"/>
+                    <a:pt x="71622" y="34437"/>
+                  </a:lnTo>
+                  <a:lnTo>
+                    <a:pt x="143245" y="68241"/>
+                  </a:lnTo>
+                  <a:lnTo>
+                    <a:pt x="214867" y="101423"/>
+                  </a:lnTo>
+                  <a:lnTo>
+                    <a:pt x="286490" y="133996"/>
+                  </a:lnTo>
+                  <a:lnTo>
+                    <a:pt x="358112" y="165969"/>
+                  </a:lnTo>
+                  <a:lnTo>
+                    <a:pt x="429735" y="197354"/>
+                  </a:lnTo>
+                  <a:lnTo>
+                    <a:pt x="501357" y="228161"/>
+                  </a:lnTo>
+                  <a:lnTo>
+                    <a:pt x="572980" y="258403"/>
+                  </a:lnTo>
+                  <a:lnTo>
+                    <a:pt x="644602" y="288088"/>
+                  </a:lnTo>
+                  <a:lnTo>
+                    <a:pt x="716225" y="317227"/>
+                  </a:lnTo>
+                  <a:lnTo>
+                    <a:pt x="787847" y="345830"/>
+                  </a:lnTo>
+                  <a:lnTo>
+                    <a:pt x="859470" y="373907"/>
+                  </a:lnTo>
+                  <a:lnTo>
+                    <a:pt x="931092" y="401468"/>
+                  </a:lnTo>
+                  <a:lnTo>
+                    <a:pt x="1002715" y="428521"/>
+                  </a:lnTo>
+                  <a:lnTo>
+                    <a:pt x="1074337" y="455078"/>
+                  </a:lnTo>
+                  <a:lnTo>
+                    <a:pt x="1145960" y="481146"/>
+                  </a:lnTo>
+                  <a:lnTo>
+                    <a:pt x="1217582" y="506734"/>
+                  </a:lnTo>
+                  <a:lnTo>
+                    <a:pt x="1289205" y="531852"/>
+                  </a:lnTo>
+                  <a:lnTo>
+                    <a:pt x="1360827" y="556508"/>
+                  </a:lnTo>
+                  <a:lnTo>
+                    <a:pt x="1432450" y="580710"/>
+                  </a:lnTo>
+                  <a:lnTo>
+                    <a:pt x="1504073" y="604467"/>
+                  </a:lnTo>
+                  <a:lnTo>
+                    <a:pt x="1575695" y="627788"/>
+                  </a:lnTo>
+                  <a:lnTo>
+                    <a:pt x="1647318" y="650679"/>
+                  </a:lnTo>
+                  <a:lnTo>
+                    <a:pt x="1718940" y="673150"/>
+                  </a:lnTo>
+                  <a:lnTo>
+                    <a:pt x="1790563" y="695207"/>
+                  </a:lnTo>
+                  <a:lnTo>
+                    <a:pt x="1862185" y="716858"/>
+                  </a:lnTo>
+                  <a:lnTo>
+                    <a:pt x="1933808" y="738112"/>
+                  </a:lnTo>
+                  <a:lnTo>
+                    <a:pt x="2005430" y="758974"/>
+                  </a:lnTo>
+                  <a:lnTo>
+                    <a:pt x="2077053" y="779453"/>
+                  </a:lnTo>
+                  <a:lnTo>
+                    <a:pt x="2148675" y="799555"/>
+                  </a:lnTo>
+                  <a:lnTo>
+                    <a:pt x="2220298" y="819287"/>
+                  </a:lnTo>
+                  <a:lnTo>
+                    <a:pt x="2291920" y="838657"/>
+                  </a:lnTo>
+                  <a:lnTo>
+                    <a:pt x="2363543" y="857670"/>
+                  </a:lnTo>
+                  <a:lnTo>
+                    <a:pt x="2435165" y="876333"/>
+                  </a:lnTo>
+                  <a:lnTo>
+                    <a:pt x="2506788" y="894654"/>
+                  </a:lnTo>
+                  <a:lnTo>
+                    <a:pt x="2578410" y="912637"/>
+                  </a:lnTo>
+                  <a:lnTo>
+                    <a:pt x="2650033" y="930290"/>
+                  </a:lnTo>
+                  <a:lnTo>
+                    <a:pt x="2721655" y="947618"/>
+                  </a:lnTo>
+                  <a:lnTo>
+                    <a:pt x="2793278" y="964627"/>
+                  </a:lnTo>
+                  <a:lnTo>
+                    <a:pt x="2864901" y="981323"/>
+                  </a:lnTo>
+                  <a:lnTo>
+                    <a:pt x="2936523" y="997713"/>
+                  </a:lnTo>
+                  <a:lnTo>
+                    <a:pt x="3008146" y="1013801"/>
+                  </a:lnTo>
+                  <a:lnTo>
+                    <a:pt x="3079768" y="1029593"/>
+                  </a:lnTo>
+                  <a:lnTo>
+                    <a:pt x="3151391" y="1045094"/>
+                  </a:lnTo>
+                  <a:lnTo>
+                    <a:pt x="3223013" y="1060311"/>
+                  </a:lnTo>
+                  <a:lnTo>
+                    <a:pt x="3294636" y="1075248"/>
+                  </a:lnTo>
+                  <a:lnTo>
+                    <a:pt x="3366258" y="1089910"/>
+                  </a:lnTo>
+                  <a:lnTo>
+                    <a:pt x="3437881" y="1104302"/>
+                  </a:lnTo>
+                  <a:lnTo>
+                    <a:pt x="3509503" y="1118429"/>
+                  </a:lnTo>
+                  <a:lnTo>
+                    <a:pt x="3581126" y="1132297"/>
+                  </a:lnTo>
+                  <a:lnTo>
+                    <a:pt x="3652748" y="1145910"/>
+                  </a:lnTo>
+                  <a:lnTo>
+                    <a:pt x="3724371" y="1159272"/>
+                  </a:lnTo>
+                  <a:lnTo>
+                    <a:pt x="3795993" y="1172389"/>
+                  </a:lnTo>
+                  <a:lnTo>
+                    <a:pt x="3867616" y="1185264"/>
+                  </a:lnTo>
+                  <a:lnTo>
+                    <a:pt x="3939238" y="1197903"/>
+                  </a:lnTo>
+                  <a:lnTo>
+                    <a:pt x="4010861" y="1210309"/>
+                  </a:lnTo>
+                  <a:lnTo>
+                    <a:pt x="4082483" y="1222487"/>
+                  </a:lnTo>
+                  <a:lnTo>
+                    <a:pt x="4154106" y="1234441"/>
+                  </a:lnTo>
+                  <a:lnTo>
+                    <a:pt x="4225729" y="1246175"/>
+                  </a:lnTo>
+                  <a:lnTo>
+                    <a:pt x="4297351" y="1257693"/>
+                  </a:lnTo>
+                  <a:lnTo>
+                    <a:pt x="4368974" y="1269000"/>
+                  </a:lnTo>
+                  <a:lnTo>
+                    <a:pt x="4440596" y="1280098"/>
+                  </a:lnTo>
+                  <a:lnTo>
+                    <a:pt x="4512219" y="1290993"/>
+                  </a:lnTo>
+                  <a:lnTo>
+                    <a:pt x="4583841" y="1301687"/>
+                  </a:lnTo>
+                  <a:lnTo>
+                    <a:pt x="4655464" y="1312184"/>
+                  </a:lnTo>
+                  <a:lnTo>
+                    <a:pt x="4727086" y="1322489"/>
+                  </a:lnTo>
+                  <a:lnTo>
+                    <a:pt x="4798709" y="1332603"/>
+                  </a:lnTo>
+                  <a:lnTo>
+                    <a:pt x="4870331" y="1342532"/>
+                  </a:lnTo>
+                  <a:lnTo>
+                    <a:pt x="4941954" y="1352278"/>
+                  </a:lnTo>
+                  <a:lnTo>
+                    <a:pt x="5013576" y="1361845"/>
+                  </a:lnTo>
+                  <a:lnTo>
+                    <a:pt x="5085199" y="1371236"/>
+                  </a:lnTo>
+                  <a:lnTo>
+                    <a:pt x="5156821" y="1380455"/>
+                  </a:lnTo>
+                  <a:lnTo>
+                    <a:pt x="5228444" y="1389503"/>
+                  </a:lnTo>
+                  <a:lnTo>
+                    <a:pt x="5300066" y="1398386"/>
+                  </a:lnTo>
+                  <a:lnTo>
+                    <a:pt x="5371689" y="1407105"/>
+                  </a:lnTo>
+                  <a:lnTo>
+                    <a:pt x="5443311" y="1415663"/>
+                  </a:lnTo>
+                  <a:lnTo>
+                    <a:pt x="5514934" y="1424064"/>
+                  </a:lnTo>
+                  <a:lnTo>
+                    <a:pt x="5586557" y="1432311"/>
+                  </a:lnTo>
+                  <a:lnTo>
+                    <a:pt x="5658179" y="1440406"/>
+                  </a:lnTo>
+                  <a:lnTo>
+                    <a:pt x="5729802" y="1448352"/>
+                  </a:lnTo>
+                  <a:lnTo>
+                    <a:pt x="5801424" y="1456152"/>
+                  </a:lnTo>
+                  <a:lnTo>
+                    <a:pt x="5873047" y="1463809"/>
+                  </a:lnTo>
+                  <a:lnTo>
+                    <a:pt x="5944669" y="1471324"/>
+                  </a:lnTo>
+                  <a:lnTo>
+                    <a:pt x="6016292" y="1478702"/>
+                  </a:lnTo>
+                  <a:lnTo>
+                    <a:pt x="6087914" y="1485944"/>
+                  </a:lnTo>
+                  <a:lnTo>
+                    <a:pt x="6159537" y="1493052"/>
+                  </a:lnTo>
+                  <a:lnTo>
+                    <a:pt x="6231159" y="1500030"/>
+                  </a:lnTo>
+                  <a:lnTo>
+                    <a:pt x="6302782" y="1506880"/>
+                  </a:lnTo>
+                  <a:lnTo>
+                    <a:pt x="6374404" y="1513603"/>
+                  </a:lnTo>
+                  <a:lnTo>
+                    <a:pt x="6446027" y="1520203"/>
+                  </a:lnTo>
+                  <a:lnTo>
+                    <a:pt x="6517649" y="1526682"/>
+                  </a:lnTo>
+                  <a:lnTo>
+                    <a:pt x="6589272" y="1533041"/>
+                  </a:lnTo>
+                  <a:lnTo>
+                    <a:pt x="6660894" y="1539283"/>
+                  </a:lnTo>
+                  <a:lnTo>
+                    <a:pt x="6732517" y="1545411"/>
+                  </a:lnTo>
+                  <a:lnTo>
+                    <a:pt x="6804139" y="1551426"/>
+                  </a:lnTo>
+                  <a:lnTo>
+                    <a:pt x="6875762" y="1557330"/>
+                  </a:lnTo>
+                  <a:lnTo>
+                    <a:pt x="6947385" y="1563126"/>
+                  </a:lnTo>
+                  <a:lnTo>
+                    <a:pt x="7019007" y="1568815"/>
+                  </a:lnTo>
+                  <a:lnTo>
+                    <a:pt x="7090630" y="1574400"/>
                   </a:lnTo>
                 </a:path>
               </a:pathLst>
@@ -5813,7 +5813,7 @@
                   <a:latin typeface="Helvetica"/>
                   <a:cs typeface="Helvetica"/>
                 </a:rPr>
-                <a:t>subHR per 10 % decline: 1.28 (1.10-1.48), p_Bonf = 0.007 (n = 6)  |  per IQR decline (Δ = 25.8 %): 1.88 (1.29-2.75)  |  IQR: [-10.7, 15.1] %</a:t>
+                <a:t>subHR per 10 % decline: 1.27 (1.10-1.48), p_Bonf = 0.007 (n = 6)  |  per IQR decline (Δ = 25.8 %): 1.87 (1.28-2.74)  |  IQR: [-10.7, 15.1] %</a:t>
               </a:r>
             </a:p>
           </p:txBody>
